--- a/machine_learning_fundamentals.pptx
+++ b/machine_learning_fundamentals.pptx
@@ -15,6 +15,17 @@
     <p:sldId id="263" r:id="rId14"/>
     <p:sldId id="264" r:id="rId15"/>
     <p:sldId id="265" r:id="rId16"/>
+    <p:sldId id="266" r:id="rId17"/>
+    <p:sldId id="267" r:id="rId18"/>
+    <p:sldId id="268" r:id="rId19"/>
+    <p:sldId id="269" r:id="rId20"/>
+    <p:sldId id="270" r:id="rId21"/>
+    <p:sldId id="271" r:id="rId22"/>
+    <p:sldId id="272" r:id="rId23"/>
+    <p:sldId id="273" r:id="rId24"/>
+    <p:sldId id="274" r:id="rId25"/>
+    <p:sldId id="275" r:id="rId26"/>
+    <p:sldId id="276" r:id="rId27"/>
   </p:sldIdLst>
   <p:sldSz cx="12188952" cy="6858000" type="screen4x3"/>
   <p:notesSz cx="6858000" cy="9144000"/>
@@ -3215,7 +3226,7 @@
               </a:defRPr>
             </a:pPr>
             <a:r>
-              <a:t>Instructor Slide Deck  •  Supervised, Unsupervised, &amp; Ensembles</a:t>
+              <a:t>Instructor Slide Deck  •  Supervised, Unsupervised, Ensembles &amp; LLMs</a:t>
             </a:r>
           </a:p>
         </p:txBody>
@@ -3277,7 +3288,7 @@
               </a:defRPr>
             </a:pPr>
             <a:r>
-              <a:t>MACHINE LEARNING FUNDAMENTALS</a:t>
+              <a:t>MODULE 7: EVALUATION &amp; VALIDATION</a:t>
             </a:r>
           </a:p>
         </p:txBody>
@@ -3305,7 +3316,7 @@
           <a:lstStyle/>
           <a:p>
             <a:pPr>
-              <a:defRPr sz="3200" b="1">
+              <a:defRPr sz="3000" b="1">
                 <a:solidFill>
                   <a:srgbClr val="F8FAFC"/>
                 </a:solidFill>
@@ -3313,7 +3324,7 @@
               </a:defRPr>
             </a:pPr>
             <a:r>
-              <a:t>Teaching Strategy &amp; Next Steps</a:t>
+              <a:t>Model Evaluation &amp; Generalization</a:t>
             </a:r>
           </a:p>
         </p:txBody>
@@ -3327,7 +3338,7 @@
         <p:spPr>
           <a:xfrm>
             <a:off x="731520" y="1645920"/>
-            <a:ext cx="10698480" cy="4389120"/>
+            <a:ext cx="5486400" cy="4389120"/>
           </a:xfrm>
           <a:prstGeom prst="roundRect">
             <a:avLst/>
@@ -3337,7 +3348,7 @@
           </a:solidFill>
           <a:ln w="19050">
             <a:solidFill>
-              <a:srgbClr val="14B8A6"/>
+              <a:srgbClr val="6366F1"/>
             </a:solidFill>
           </a:ln>
         </p:spPr>
@@ -3371,8 +3382,8 @@
         </p:nvSpPr>
         <p:spPr>
           <a:xfrm>
-            <a:off x="1097280" y="1828800"/>
-            <a:ext cx="9966960" cy="4023360"/>
+            <a:off x="914400" y="1828800"/>
+            <a:ext cx="5120640" cy="4023360"/>
           </a:xfrm>
           <a:prstGeom prst="rect">
             <a:avLst/>
@@ -3387,9 +3398,9 @@
           <a:p>
             <a:pPr>
               <a:spcAft>
-                <a:spcPts val="1400"/>
-              </a:spcAft>
-              <a:defRPr sz="2400" b="1">
+                <a:spcPts val="1200"/>
+              </a:spcAft>
+              <a:defRPr sz="2000" b="1">
                 <a:solidFill>
                   <a:srgbClr val="14B8A6"/>
                 </a:solidFill>
@@ -3397,86 +3408,2785 @@
               </a:defRPr>
             </a:pPr>
             <a:r>
-              <a:t>Recommended Lecture Structure</a:t>
-            </a:r>
-          </a:p>
+              <a:t>Validation &amp; Performance Metrics</a:t>
+            </a:r>
+          </a:p>
+          <a:p>
+            <a:pPr>
+              <a:spcAft>
+                <a:spcPts val="800"/>
+              </a:spcAft>
+              <a:defRPr sz="1300">
+                <a:solidFill>
+                  <a:srgbClr val="A1A1AA"/>
+                </a:solidFill>
+                <a:latin typeface="Arial"/>
+              </a:defRPr>
+            </a:pPr>
+            <a:r>
+              <a:t>Bias-Variance Tradeoff: Underfitting (High Bias) vs. Overfitting (High Variance). Goal is minimizing total test error.</a:t>
+            </a:r>
+          </a:p>
+          <a:p>
+            <a:pPr>
+              <a:spcAft>
+                <a:spcPts val="800"/>
+              </a:spcAft>
+              <a:defRPr sz="1300">
+                <a:solidFill>
+                  <a:srgbClr val="A1A1AA"/>
+                </a:solidFill>
+                <a:latin typeface="Arial"/>
+              </a:defRPr>
+            </a:pPr>
+            <a:r>
+              <a:t>K-Fold Cross-Validation: Splits data into K folds, cycling train/test roles to obtain robust performance bounds.</a:t>
+            </a:r>
+          </a:p>
+          <a:p>
+            <a:pPr>
+              <a:spcAft>
+                <a:spcPts val="800"/>
+              </a:spcAft>
+              <a:defRPr sz="1300">
+                <a:solidFill>
+                  <a:srgbClr val="A1A1AA"/>
+                </a:solidFill>
+                <a:latin typeface="Arial"/>
+              </a:defRPr>
+            </a:pPr>
+            <a:r>
+              <a:t>Classification Metrics: Derived from the Confusion Matrix.</a:t>
+            </a:r>
+          </a:p>
+          <a:p>
+            <a:pPr>
+              <a:spcAft>
+                <a:spcPts val="800"/>
+              </a:spcAft>
+              <a:defRPr sz="1200">
+                <a:solidFill>
+                  <a:srgbClr val="A1A1AA"/>
+                </a:solidFill>
+                <a:latin typeface="Arial"/>
+              </a:defRPr>
+            </a:pPr>
+            <a:r>
+              <a:t>    - Precision: TP / (TP + FP) (Quality of positive predictions).</a:t>
+            </a:r>
+          </a:p>
+          <a:p>
+            <a:pPr>
+              <a:spcAft>
+                <a:spcPts val="800"/>
+              </a:spcAft>
+              <a:defRPr sz="1200">
+                <a:solidFill>
+                  <a:srgbClr val="A1A1AA"/>
+                </a:solidFill>
+                <a:latin typeface="Arial"/>
+              </a:defRPr>
+            </a:pPr>
+            <a:r>
+              <a:t>    - Recall: TP / (TP + FN) (Coverage of actual positive samples).</a:t>
+            </a:r>
+          </a:p>
+          <a:p>
+            <a:pPr>
+              <a:spcAft>
+                <a:spcPts val="800"/>
+              </a:spcAft>
+              <a:defRPr sz="1200">
+                <a:solidFill>
+                  <a:srgbClr val="A1A1AA"/>
+                </a:solidFill>
+                <a:latin typeface="Arial"/>
+              </a:defRPr>
+            </a:pPr>
+            <a:r>
+              <a:t>    - F1-Score: Harmonic mean of Precision and Recall.</a:t>
+            </a:r>
+          </a:p>
+          <a:p>
+            <a:pPr>
+              <a:spcAft>
+                <a:spcPts val="800"/>
+              </a:spcAft>
+              <a:defRPr sz="1200">
+                <a:solidFill>
+                  <a:srgbClr val="A1A1AA"/>
+                </a:solidFill>
+                <a:latin typeface="Arial"/>
+              </a:defRPr>
+            </a:pPr>
+            <a:r>
+              <a:t>    - ROC-AUC: True Positive vs. False Positive rate probability area.</a:t>
+            </a:r>
+          </a:p>
+        </p:txBody>
+      </p:sp>
+      <p:pic>
+        <p:nvPicPr>
+          <p:cNvPr id="6" name="Picture 5" descr="examples_8_evaluation.png"/>
+          <p:cNvPicPr>
+            <a:picLocks noChangeAspect="1"/>
+          </p:cNvPicPr>
+          <p:nvPr/>
+        </p:nvPicPr>
+        <p:blipFill>
+          <a:blip r:embed="rId2"/>
+          <a:stretch>
+            <a:fillRect/>
+          </a:stretch>
+        </p:blipFill>
+        <p:spPr>
+          <a:xfrm>
+            <a:off x="6583680" y="2801983"/>
+            <a:ext cx="4846320" cy="2076994"/>
+          </a:xfrm>
+          <a:prstGeom prst="rect">
+            <a:avLst/>
+          </a:prstGeom>
+        </p:spPr>
+      </p:pic>
+    </p:spTree>
+  </p:cSld>
+  <p:clrMapOvr>
+    <a:masterClrMapping/>
+  </p:clrMapOvr>
+</p:sld>
+</file>
+
+<file path=ppt/slides/slide11.xml><?xml version="1.0" encoding="utf-8"?>
+<p:sld xmlns:a="http://schemas.openxmlformats.org/drawingml/2006/main" xmlns:p="http://schemas.openxmlformats.org/presentationml/2006/main" xmlns:r="http://schemas.openxmlformats.org/officeDocument/2006/relationships">
+  <p:cSld>
+    <p:bg>
+      <p:bgPr>
+        <a:solidFill>
+          <a:srgbClr val="121214"/>
+        </a:solidFill>
+        <a:effectLst/>
+      </p:bgPr>
+    </p:bg>
+    <p:spTree>
+      <p:nvGrpSpPr>
+        <p:cNvPr id="1" name=""/>
+        <p:cNvGrpSpPr/>
+        <p:nvPr/>
+      </p:nvGrpSpPr>
+      <p:grpSpPr/>
+      <p:sp>
+        <p:nvSpPr>
+          <p:cNvPr id="2" name="TextBox 1"/>
+          <p:cNvSpPr txBox="1"/>
+          <p:nvPr/>
+        </p:nvSpPr>
+        <p:spPr>
+          <a:xfrm>
+            <a:off x="731520" y="365760"/>
+            <a:ext cx="10058400" cy="274320"/>
+          </a:xfrm>
+          <a:prstGeom prst="rect">
+            <a:avLst/>
+          </a:prstGeom>
+          <a:noFill/>
+        </p:spPr>
+        <p:txBody>
+          <a:bodyPr wrap="square" tIns="0" bIns="0" lIns="0" rIns="0">
+            <a:spAutoFit/>
+          </a:bodyPr>
+          <a:lstStyle/>
+          <a:p>
+            <a:pPr>
+              <a:defRPr sz="1000" b="1">
+                <a:solidFill>
+                  <a:srgbClr val="14B8A6"/>
+                </a:solidFill>
+                <a:latin typeface="Arial"/>
+              </a:defRPr>
+            </a:pPr>
+            <a:r>
+              <a:t>MODULE 8: CODE WALKTHROUGHS</a:t>
+            </a:r>
+          </a:p>
+        </p:txBody>
+      </p:sp>
+      <p:sp>
+        <p:nvSpPr>
+          <p:cNvPr id="3" name="TextBox 2"/>
+          <p:cNvSpPr txBox="1"/>
+          <p:nvPr/>
+        </p:nvSpPr>
+        <p:spPr>
+          <a:xfrm>
+            <a:off x="731520" y="548640"/>
+            <a:ext cx="10058400" cy="731520"/>
+          </a:xfrm>
+          <a:prstGeom prst="rect">
+            <a:avLst/>
+          </a:prstGeom>
+          <a:noFill/>
+        </p:spPr>
+        <p:txBody>
+          <a:bodyPr wrap="square" tIns="0" bIns="0" lIns="0" rIns="0">
+            <a:spAutoFit/>
+          </a:bodyPr>
+          <a:lstStyle/>
+          <a:p>
+            <a:pPr>
+              <a:defRPr sz="3000" b="1">
+                <a:solidFill>
+                  <a:srgbClr val="F8FAFC"/>
+                </a:solidFill>
+                <a:latin typeface="Arial"/>
+              </a:defRPr>
+            </a:pPr>
+            <a:r>
+              <a:t>Framework vs. From-Scratch Algorithms</a:t>
+            </a:r>
+          </a:p>
+        </p:txBody>
+      </p:sp>
+      <p:sp>
+        <p:nvSpPr>
+          <p:cNvPr id="4" name="Rounded Rectangle 3"/>
+          <p:cNvSpPr/>
+          <p:nvPr/>
+        </p:nvSpPr>
+        <p:spPr>
+          <a:xfrm>
+            <a:off x="731520" y="1645920"/>
+            <a:ext cx="5486400" cy="4389120"/>
+          </a:xfrm>
+          <a:prstGeom prst="roundRect">
+            <a:avLst/>
+          </a:prstGeom>
+          <a:solidFill>
+            <a:srgbClr val="1E1E24"/>
+          </a:solidFill>
+          <a:ln w="19050">
+            <a:solidFill>
+              <a:srgbClr val="F59E0B"/>
+            </a:solidFill>
+          </a:ln>
+        </p:spPr>
+        <p:style>
+          <a:lnRef idx="1">
+            <a:schemeClr val="accent1"/>
+          </a:lnRef>
+          <a:fillRef idx="3">
+            <a:schemeClr val="accent1"/>
+          </a:fillRef>
+          <a:effectRef idx="2">
+            <a:schemeClr val="accent1"/>
+          </a:effectRef>
+          <a:fontRef idx="minor">
+            <a:schemeClr val="lt1"/>
+          </a:fontRef>
+        </p:style>
+        <p:txBody>
+          <a:bodyPr rtlCol="0" anchor="ctr"/>
+          <a:lstStyle/>
+          <a:p>
+            <a:pPr algn="ctr"/>
+          </a:p>
+        </p:txBody>
+      </p:sp>
+      <p:sp>
+        <p:nvSpPr>
+          <p:cNvPr id="5" name="TextBox 4"/>
+          <p:cNvSpPr txBox="1"/>
+          <p:nvPr/>
+        </p:nvSpPr>
+        <p:spPr>
+          <a:xfrm>
+            <a:off x="914400" y="1828800"/>
+            <a:ext cx="5120640" cy="4023360"/>
+          </a:xfrm>
+          <a:prstGeom prst="rect">
+            <a:avLst/>
+          </a:prstGeom>
+          <a:noFill/>
+        </p:spPr>
+        <p:txBody>
+          <a:bodyPr wrap="square">
+            <a:spAutoFit/>
+          </a:bodyPr>
+          <a:lstStyle/>
           <a:p>
             <a:pPr>
               <a:spcAft>
                 <a:spcPts val="1200"/>
               </a:spcAft>
-              <a:defRPr sz="1600">
-                <a:solidFill>
-                  <a:srgbClr val="A1A1AA"/>
-                </a:solidFill>
-              </a:defRPr>
-            </a:pPr>
-            <a:r>
-              <a:t>1. Start with Paradigms: Make students classify everyday examples manually.</a:t>
-            </a:r>
-          </a:p>
+              <a:defRPr sz="2000" b="1">
+                <a:solidFill>
+                  <a:srgbClr val="14B8A6"/>
+                </a:solidFill>
+                <a:latin typeface="Arial"/>
+              </a:defRPr>
+            </a:pPr>
+            <a:r>
+              <a:t>Pedagogical Implementation Strategy</a:t>
+            </a:r>
+          </a:p>
+          <a:p>
+            <a:pPr>
+              <a:spcAft>
+                <a:spcPts val="800"/>
+              </a:spcAft>
+              <a:defRPr sz="1300">
+                <a:solidFill>
+                  <a:srgbClr val="A1A1AA"/>
+                </a:solidFill>
+                <a:latin typeface="Arial"/>
+              </a:defRPr>
+            </a:pPr>
+            <a:r>
+              <a:t>Dual-Path Curriculum: Every algorithm is explored via two implementations: Scikit-Learn and Pure Python.</a:t>
+            </a:r>
+          </a:p>
+          <a:p>
+            <a:pPr>
+              <a:spcAft>
+                <a:spcPts val="800"/>
+              </a:spcAft>
+              <a:defRPr sz="1300">
+                <a:solidFill>
+                  <a:srgbClr val="A1A1AA"/>
+                </a:solidFill>
+                <a:latin typeface="Arial"/>
+              </a:defRPr>
+            </a:pPr>
+            <a:r>
+              <a:t>Framework Path: Teaches APIs, hyperparameter tuning, pipelines, and industry best practices.</a:t>
+            </a:r>
+          </a:p>
+          <a:p>
+            <a:pPr>
+              <a:spcAft>
+                <a:spcPts val="800"/>
+              </a:spcAft>
+              <a:defRPr sz="1300">
+                <a:solidFill>
+                  <a:srgbClr val="A1A1AA"/>
+                </a:solidFill>
+                <a:latin typeface="Arial"/>
+              </a:defRPr>
+            </a:pPr>
+            <a:r>
+              <a:t>From-Scratch Path: Avoids libraries. Uses standard lists and math functions to write loops, gradients, and Gini calculations.</a:t>
+            </a:r>
+          </a:p>
+          <a:p>
+            <a:pPr>
+              <a:spcAft>
+                <a:spcPts val="800"/>
+              </a:spcAft>
+              <a:defRPr sz="1300">
+                <a:solidFill>
+                  <a:srgbClr val="A1A1AA"/>
+                </a:solidFill>
+                <a:latin typeface="Arial"/>
+              </a:defRPr>
+            </a:pPr>
+            <a:r>
+              <a:t>De-mystifying the 'Black Box': Solidifies mathematical equations directly into concrete, readable code.</a:t>
+            </a:r>
+          </a:p>
+          <a:p>
+            <a:pPr>
+              <a:spcAft>
+                <a:spcPts val="800"/>
+              </a:spcAft>
+              <a:defRPr sz="1300">
+                <a:solidFill>
+                  <a:srgbClr val="A1A1AA"/>
+                </a:solidFill>
+                <a:latin typeface="Arial"/>
+              </a:defRPr>
+            </a:pPr>
+            <a:r>
+              <a:t>Visual: Pure Python Gradient Descent line-fitting convergence over epochs.</a:t>
+            </a:r>
+          </a:p>
+        </p:txBody>
+      </p:sp>
+      <p:pic>
+        <p:nvPicPr>
+          <p:cNvPr id="6" name="Picture 5" descr="scratch_1_regression.png"/>
+          <p:cNvPicPr>
+            <a:picLocks noChangeAspect="1"/>
+          </p:cNvPicPr>
+          <p:nvPr/>
+        </p:nvPicPr>
+        <p:blipFill>
+          <a:blip r:embed="rId2"/>
+          <a:stretch>
+            <a:fillRect/>
+          </a:stretch>
+        </p:blipFill>
+        <p:spPr>
+          <a:xfrm>
+            <a:off x="6583680" y="2801983"/>
+            <a:ext cx="4846320" cy="2076994"/>
+          </a:xfrm>
+          <a:prstGeom prst="rect">
+            <a:avLst/>
+          </a:prstGeom>
+        </p:spPr>
+      </p:pic>
+    </p:spTree>
+  </p:cSld>
+  <p:clrMapOvr>
+    <a:masterClrMapping/>
+  </p:clrMapOvr>
+</p:sld>
+</file>
+
+<file path=ppt/slides/slide12.xml><?xml version="1.0" encoding="utf-8"?>
+<p:sld xmlns:a="http://schemas.openxmlformats.org/drawingml/2006/main" xmlns:p="http://schemas.openxmlformats.org/presentationml/2006/main" xmlns:r="http://schemas.openxmlformats.org/officeDocument/2006/relationships">
+  <p:cSld>
+    <p:bg>
+      <p:bgPr>
+        <a:solidFill>
+          <a:srgbClr val="121214"/>
+        </a:solidFill>
+        <a:effectLst/>
+      </p:bgPr>
+    </p:bg>
+    <p:spTree>
+      <p:nvGrpSpPr>
+        <p:cNvPr id="1" name=""/>
+        <p:cNvGrpSpPr/>
+        <p:nvPr/>
+      </p:nvGrpSpPr>
+      <p:grpSpPr/>
+      <p:sp>
+        <p:nvSpPr>
+          <p:cNvPr id="2" name="TextBox 1"/>
+          <p:cNvSpPr txBox="1"/>
+          <p:nvPr/>
+        </p:nvSpPr>
+        <p:spPr>
+          <a:xfrm>
+            <a:off x="731520" y="365760"/>
+            <a:ext cx="10058400" cy="274320"/>
+          </a:xfrm>
+          <a:prstGeom prst="rect">
+            <a:avLst/>
+          </a:prstGeom>
+          <a:noFill/>
+        </p:spPr>
+        <p:txBody>
+          <a:bodyPr wrap="square" tIns="0" bIns="0" lIns="0" rIns="0">
+            <a:spAutoFit/>
+          </a:bodyPr>
+          <a:lstStyle/>
+          <a:p>
+            <a:pPr>
+              <a:defRPr sz="1000" b="1">
+                <a:solidFill>
+                  <a:srgbClr val="14B8A6"/>
+                </a:solidFill>
+                <a:latin typeface="Arial"/>
+              </a:defRPr>
+            </a:pPr>
+            <a:r>
+              <a:t>MODULE 9: LLMS &amp; TRANSFORMERS</a:t>
+            </a:r>
+          </a:p>
+        </p:txBody>
+      </p:sp>
+      <p:sp>
+        <p:nvSpPr>
+          <p:cNvPr id="3" name="TextBox 2"/>
+          <p:cNvSpPr txBox="1"/>
+          <p:nvPr/>
+        </p:nvSpPr>
+        <p:spPr>
+          <a:xfrm>
+            <a:off x="731520" y="548640"/>
+            <a:ext cx="10058400" cy="731520"/>
+          </a:xfrm>
+          <a:prstGeom prst="rect">
+            <a:avLst/>
+          </a:prstGeom>
+          <a:noFill/>
+        </p:spPr>
+        <p:txBody>
+          <a:bodyPr wrap="square" tIns="0" bIns="0" lIns="0" rIns="0">
+            <a:spAutoFit/>
+          </a:bodyPr>
+          <a:lstStyle/>
+          <a:p>
+            <a:pPr>
+              <a:defRPr sz="3000" b="1">
+                <a:solidFill>
+                  <a:srgbClr val="F8FAFC"/>
+                </a:solidFill>
+                <a:latin typeface="Arial"/>
+              </a:defRPr>
+            </a:pPr>
+            <a:r>
+              <a:t>Tokenization: Byte Pair Encoding (BPE)</a:t>
+            </a:r>
+          </a:p>
+        </p:txBody>
+      </p:sp>
+      <p:sp>
+        <p:nvSpPr>
+          <p:cNvPr id="4" name="Rounded Rectangle 3"/>
+          <p:cNvSpPr/>
+          <p:nvPr/>
+        </p:nvSpPr>
+        <p:spPr>
+          <a:xfrm>
+            <a:off x="731520" y="1645920"/>
+            <a:ext cx="5486400" cy="4389120"/>
+          </a:xfrm>
+          <a:prstGeom prst="roundRect">
+            <a:avLst/>
+          </a:prstGeom>
+          <a:solidFill>
+            <a:srgbClr val="1E1E24"/>
+          </a:solidFill>
+          <a:ln w="19050">
+            <a:solidFill>
+              <a:srgbClr val="14B8A6"/>
+            </a:solidFill>
+          </a:ln>
+        </p:spPr>
+        <p:style>
+          <a:lnRef idx="1">
+            <a:schemeClr val="accent1"/>
+          </a:lnRef>
+          <a:fillRef idx="3">
+            <a:schemeClr val="accent1"/>
+          </a:fillRef>
+          <a:effectRef idx="2">
+            <a:schemeClr val="accent1"/>
+          </a:effectRef>
+          <a:fontRef idx="minor">
+            <a:schemeClr val="lt1"/>
+          </a:fontRef>
+        </p:style>
+        <p:txBody>
+          <a:bodyPr rtlCol="0" anchor="ctr"/>
+          <a:lstStyle/>
+          <a:p>
+            <a:pPr algn="ctr"/>
+          </a:p>
+        </p:txBody>
+      </p:sp>
+      <p:sp>
+        <p:nvSpPr>
+          <p:cNvPr id="5" name="TextBox 4"/>
+          <p:cNvSpPr txBox="1"/>
+          <p:nvPr/>
+        </p:nvSpPr>
+        <p:spPr>
+          <a:xfrm>
+            <a:off x="914400" y="1828800"/>
+            <a:ext cx="5120640" cy="4023360"/>
+          </a:xfrm>
+          <a:prstGeom prst="rect">
+            <a:avLst/>
+          </a:prstGeom>
+          <a:noFill/>
+        </p:spPr>
+        <p:txBody>
+          <a:bodyPr wrap="square">
+            <a:spAutoFit/>
+          </a:bodyPr>
+          <a:lstStyle/>
           <a:p>
             <a:pPr>
               <a:spcAft>
                 <a:spcPts val="1200"/>
               </a:spcAft>
-              <a:defRPr sz="1600">
-                <a:solidFill>
-                  <a:srgbClr val="A1A1AA"/>
-                </a:solidFill>
-              </a:defRPr>
-            </a:pPr>
-            <a:r>
-              <a:t>2. Regression vs. Classification: Differentiate numeric forecasting vs. discrete categorization.</a:t>
-            </a:r>
-          </a:p>
+              <a:defRPr sz="2000" b="1">
+                <a:solidFill>
+                  <a:srgbClr val="14B8A6"/>
+                </a:solidFill>
+                <a:latin typeface="Arial"/>
+              </a:defRPr>
+            </a:pPr>
+            <a:r>
+              <a:t>Subword Text Segmentation</a:t>
+            </a:r>
+          </a:p>
+          <a:p>
+            <a:pPr>
+              <a:spcAft>
+                <a:spcPts val="800"/>
+              </a:spcAft>
+              <a:defRPr sz="1300">
+                <a:solidFill>
+                  <a:srgbClr val="A1A1AA"/>
+                </a:solidFill>
+                <a:latin typeface="Arial"/>
+              </a:defRPr>
+            </a:pPr>
+            <a:r>
+              <a:t>Flaws of Word/Char Tokenizers: Massive vocabulary sizes (memory heavy) or inability to handle unseen out-of-vocabulary (OOV) words.</a:t>
+            </a:r>
+          </a:p>
+          <a:p>
+            <a:pPr>
+              <a:spcAft>
+                <a:spcPts val="800"/>
+              </a:spcAft>
+              <a:defRPr sz="1300">
+                <a:solidFill>
+                  <a:srgbClr val="A1A1AA"/>
+                </a:solidFill>
+                <a:latin typeface="Arial"/>
+              </a:defRPr>
+            </a:pPr>
+            <a:r>
+              <a:t>BPE Concept: Dynamically merges the most frequent adjacent byte/character pairs into new subword units.</a:t>
+            </a:r>
+          </a:p>
+          <a:p>
+            <a:pPr>
+              <a:spcAft>
+                <a:spcPts val="800"/>
+              </a:spcAft>
+              <a:defRPr sz="1300">
+                <a:solidFill>
+                  <a:srgbClr val="A1A1AA"/>
+                </a:solidFill>
+                <a:latin typeface="Arial"/>
+              </a:defRPr>
+            </a:pPr>
+            <a:r>
+              <a:t>Algorithm Steps:</a:t>
+            </a:r>
+          </a:p>
+          <a:p>
+            <a:pPr>
+              <a:spcAft>
+                <a:spcPts val="800"/>
+              </a:spcAft>
+              <a:defRPr sz="1300">
+                <a:solidFill>
+                  <a:srgbClr val="A1A1AA"/>
+                </a:solidFill>
+                <a:latin typeface="Arial"/>
+              </a:defRPr>
+            </a:pPr>
+            <a:r>
+              <a:t>  1. Initialize vocabulary with individual characters + '&lt;/w&gt;' marker.</a:t>
+            </a:r>
+          </a:p>
+          <a:p>
+            <a:pPr>
+              <a:spcAft>
+                <a:spcPts val="800"/>
+              </a:spcAft>
+              <a:defRPr sz="1300">
+                <a:solidFill>
+                  <a:srgbClr val="A1A1AA"/>
+                </a:solidFill>
+                <a:latin typeface="Arial"/>
+              </a:defRPr>
+            </a:pPr>
+            <a:r>
+              <a:t>  2. Count frequencies of adjacent token pairs (bigrams) in the corpus.</a:t>
+            </a:r>
+          </a:p>
+          <a:p>
+            <a:pPr>
+              <a:spcAft>
+                <a:spcPts val="800"/>
+              </a:spcAft>
+              <a:defRPr sz="1300">
+                <a:solidFill>
+                  <a:srgbClr val="A1A1AA"/>
+                </a:solidFill>
+                <a:latin typeface="Arial"/>
+              </a:defRPr>
+            </a:pPr>
+            <a:r>
+              <a:t>  3. Merge the most frequent bigram and add it to the vocabulary.</a:t>
+            </a:r>
+          </a:p>
+          <a:p>
+            <a:pPr>
+              <a:spcAft>
+                <a:spcPts val="800"/>
+              </a:spcAft>
+              <a:defRPr sz="1300">
+                <a:solidFill>
+                  <a:srgbClr val="A1A1AA"/>
+                </a:solidFill>
+                <a:latin typeface="Arial"/>
+              </a:defRPr>
+            </a:pPr>
+            <a:r>
+              <a:t>  4. Repeat for N merge iterations.</a:t>
+            </a:r>
+          </a:p>
+          <a:p>
+            <a:pPr>
+              <a:spcAft>
+                <a:spcPts val="800"/>
+              </a:spcAft>
+              <a:defRPr sz="1300">
+                <a:solidFill>
+                  <a:srgbClr val="A1A1AA"/>
+                </a:solidFill>
+                <a:latin typeface="Arial"/>
+              </a:defRPr>
+            </a:pPr>
+            <a:r>
+              <a:t>Visual: Vocabulary size growth vs. BPE merge rules application.</a:t>
+            </a:r>
+          </a:p>
+        </p:txBody>
+      </p:sp>
+      <p:pic>
+        <p:nvPicPr>
+          <p:cNvPr id="6" name="Picture 5" descr="llm_1_bpe_vocab.png"/>
+          <p:cNvPicPr>
+            <a:picLocks noChangeAspect="1"/>
+          </p:cNvPicPr>
+          <p:nvPr/>
+        </p:nvPicPr>
+        <p:blipFill>
+          <a:blip r:embed="rId2"/>
+          <a:stretch>
+            <a:fillRect/>
+          </a:stretch>
+        </p:blipFill>
+        <p:spPr>
+          <a:xfrm>
+            <a:off x="6583680" y="2494280"/>
+            <a:ext cx="4846320" cy="2692400"/>
+          </a:xfrm>
+          <a:prstGeom prst="rect">
+            <a:avLst/>
+          </a:prstGeom>
+        </p:spPr>
+      </p:pic>
+    </p:spTree>
+  </p:cSld>
+  <p:clrMapOvr>
+    <a:masterClrMapping/>
+  </p:clrMapOvr>
+</p:sld>
+</file>
+
+<file path=ppt/slides/slide13.xml><?xml version="1.0" encoding="utf-8"?>
+<p:sld xmlns:a="http://schemas.openxmlformats.org/drawingml/2006/main" xmlns:p="http://schemas.openxmlformats.org/presentationml/2006/main" xmlns:r="http://schemas.openxmlformats.org/officeDocument/2006/relationships">
+  <p:cSld>
+    <p:bg>
+      <p:bgPr>
+        <a:solidFill>
+          <a:srgbClr val="121214"/>
+        </a:solidFill>
+        <a:effectLst/>
+      </p:bgPr>
+    </p:bg>
+    <p:spTree>
+      <p:nvGrpSpPr>
+        <p:cNvPr id="1" name=""/>
+        <p:cNvGrpSpPr/>
+        <p:nvPr/>
+      </p:nvGrpSpPr>
+      <p:grpSpPr/>
+      <p:sp>
+        <p:nvSpPr>
+          <p:cNvPr id="2" name="TextBox 1"/>
+          <p:cNvSpPr txBox="1"/>
+          <p:nvPr/>
+        </p:nvSpPr>
+        <p:spPr>
+          <a:xfrm>
+            <a:off x="731520" y="365760"/>
+            <a:ext cx="10058400" cy="274320"/>
+          </a:xfrm>
+          <a:prstGeom prst="rect">
+            <a:avLst/>
+          </a:prstGeom>
+          <a:noFill/>
+        </p:spPr>
+        <p:txBody>
+          <a:bodyPr wrap="square" tIns="0" bIns="0" lIns="0" rIns="0">
+            <a:spAutoFit/>
+          </a:bodyPr>
+          <a:lstStyle/>
+          <a:p>
+            <a:pPr>
+              <a:defRPr sz="1000" b="1">
+                <a:solidFill>
+                  <a:srgbClr val="14B8A6"/>
+                </a:solidFill>
+                <a:latin typeface="Arial"/>
+              </a:defRPr>
+            </a:pPr>
+            <a:r>
+              <a:t>MODULE 9: LLMS &amp; TRANSFORMERS</a:t>
+            </a:r>
+          </a:p>
+        </p:txBody>
+      </p:sp>
+      <p:sp>
+        <p:nvSpPr>
+          <p:cNvPr id="3" name="TextBox 2"/>
+          <p:cNvSpPr txBox="1"/>
+          <p:nvPr/>
+        </p:nvSpPr>
+        <p:spPr>
+          <a:xfrm>
+            <a:off x="731520" y="548640"/>
+            <a:ext cx="10058400" cy="731520"/>
+          </a:xfrm>
+          <a:prstGeom prst="rect">
+            <a:avLst/>
+          </a:prstGeom>
+          <a:noFill/>
+        </p:spPr>
+        <p:txBody>
+          <a:bodyPr wrap="square" tIns="0" bIns="0" lIns="0" rIns="0">
+            <a:spAutoFit/>
+          </a:bodyPr>
+          <a:lstStyle/>
+          <a:p>
+            <a:pPr>
+              <a:defRPr sz="3000" b="1">
+                <a:solidFill>
+                  <a:srgbClr val="F8FAFC"/>
+                </a:solidFill>
+                <a:latin typeface="Arial"/>
+              </a:defRPr>
+            </a:pPr>
+            <a:r>
+              <a:t>Vector Semantics: Word Embeddings</a:t>
+            </a:r>
+          </a:p>
+        </p:txBody>
+      </p:sp>
+      <p:sp>
+        <p:nvSpPr>
+          <p:cNvPr id="4" name="Rounded Rectangle 3"/>
+          <p:cNvSpPr/>
+          <p:nvPr/>
+        </p:nvSpPr>
+        <p:spPr>
+          <a:xfrm>
+            <a:off x="731520" y="1645920"/>
+            <a:ext cx="5486400" cy="4389120"/>
+          </a:xfrm>
+          <a:prstGeom prst="roundRect">
+            <a:avLst/>
+          </a:prstGeom>
+          <a:solidFill>
+            <a:srgbClr val="1E1E24"/>
+          </a:solidFill>
+          <a:ln w="19050">
+            <a:solidFill>
+              <a:srgbClr val="6366F1"/>
+            </a:solidFill>
+          </a:ln>
+        </p:spPr>
+        <p:style>
+          <a:lnRef idx="1">
+            <a:schemeClr val="accent1"/>
+          </a:lnRef>
+          <a:fillRef idx="3">
+            <a:schemeClr val="accent1"/>
+          </a:fillRef>
+          <a:effectRef idx="2">
+            <a:schemeClr val="accent1"/>
+          </a:effectRef>
+          <a:fontRef idx="minor">
+            <a:schemeClr val="lt1"/>
+          </a:fontRef>
+        </p:style>
+        <p:txBody>
+          <a:bodyPr rtlCol="0" anchor="ctr"/>
+          <a:lstStyle/>
+          <a:p>
+            <a:pPr algn="ctr"/>
+          </a:p>
+        </p:txBody>
+      </p:sp>
+      <p:sp>
+        <p:nvSpPr>
+          <p:cNvPr id="5" name="TextBox 4"/>
+          <p:cNvSpPr txBox="1"/>
+          <p:nvPr/>
+        </p:nvSpPr>
+        <p:spPr>
+          <a:xfrm>
+            <a:off x="914400" y="1828800"/>
+            <a:ext cx="5120640" cy="4023360"/>
+          </a:xfrm>
+          <a:prstGeom prst="rect">
+            <a:avLst/>
+          </a:prstGeom>
+          <a:noFill/>
+        </p:spPr>
+        <p:txBody>
+          <a:bodyPr wrap="square">
+            <a:spAutoFit/>
+          </a:bodyPr>
+          <a:lstStyle/>
           <a:p>
             <a:pPr>
               <a:spcAft>
                 <a:spcPts val="1200"/>
               </a:spcAft>
-              <a:defRPr sz="1600">
-                <a:solidFill>
-                  <a:srgbClr val="A1A1AA"/>
-                </a:solidFill>
-              </a:defRPr>
-            </a:pPr>
-            <a:r>
-              <a:t>3. Mathematics to Code: Show the formulas (Lasso, Logistic) side-by-side with scikit-learn models.</a:t>
-            </a:r>
-          </a:p>
+              <a:defRPr sz="2000" b="1">
+                <a:solidFill>
+                  <a:srgbClr val="14B8A6"/>
+                </a:solidFill>
+                <a:latin typeface="Arial"/>
+              </a:defRPr>
+            </a:pPr>
+            <a:r>
+              <a:t>Continuous Word Semantics</a:t>
+            </a:r>
+          </a:p>
+          <a:p>
+            <a:pPr>
+              <a:spcAft>
+                <a:spcPts val="800"/>
+              </a:spcAft>
+              <a:defRPr sz="1300">
+                <a:solidFill>
+                  <a:srgbClr val="A1A1AA"/>
+                </a:solidFill>
+                <a:latin typeface="Arial"/>
+              </a:defRPr>
+            </a:pPr>
+            <a:r>
+              <a:t>Embedding Concept: Maps raw strings to dense, low-dimensional continuous vectors where geometric closeness represents semantic meaning.</a:t>
+            </a:r>
+          </a:p>
+          <a:p>
+            <a:pPr>
+              <a:spcAft>
+                <a:spcPts val="800"/>
+              </a:spcAft>
+              <a:defRPr sz="1300">
+                <a:solidFill>
+                  <a:srgbClr val="A1A1AA"/>
+                </a:solidFill>
+                <a:latin typeface="Arial"/>
+              </a:defRPr>
+            </a:pPr>
+            <a:r>
+              <a:t>Word2Vec Skip-gram: Neural network trained to predict context words given a target input word.</a:t>
+            </a:r>
+          </a:p>
+          <a:p>
+            <a:pPr>
+              <a:spcAft>
+                <a:spcPts val="800"/>
+              </a:spcAft>
+              <a:defRPr sz="1300">
+                <a:solidFill>
+                  <a:srgbClr val="A1A1AA"/>
+                </a:solidFill>
+                <a:latin typeface="Arial"/>
+              </a:defRPr>
+            </a:pPr>
+            <a:r>
+              <a:t>Negative Sampling Loss: Avoids expensive full softmax by training a binary classifier on positive context pairs vs. random negative pairs.</a:t>
+            </a:r>
+          </a:p>
+          <a:p>
+            <a:pPr>
+              <a:spcAft>
+                <a:spcPts val="800"/>
+              </a:spcAft>
+              <a:defRPr sz="1300">
+                <a:solidFill>
+                  <a:srgbClr val="A1A1AA"/>
+                </a:solidFill>
+                <a:latin typeface="Arial"/>
+              </a:defRPr>
+            </a:pPr>
+            <a:r>
+              <a:t>Optimization: Adjusts embedding weights using SGD, forcing related terms (e.g. models/networks) to cluster together.</a:t>
+            </a:r>
+          </a:p>
+          <a:p>
+            <a:pPr>
+              <a:spcAft>
+                <a:spcPts val="800"/>
+              </a:spcAft>
+              <a:defRPr sz="1300">
+                <a:solidFill>
+                  <a:srgbClr val="A1A1AA"/>
+                </a:solidFill>
+                <a:latin typeface="Arial"/>
+              </a:defRPr>
+            </a:pPr>
+            <a:r>
+              <a:t>Visual: Trained 2D Word2Vec scatter plot showing semantic clusters.</a:t>
+            </a:r>
+          </a:p>
+        </p:txBody>
+      </p:sp>
+      <p:pic>
+        <p:nvPicPr>
+          <p:cNvPr id="6" name="Picture 5" descr="llm_2_word2vec.png"/>
+          <p:cNvPicPr>
+            <a:picLocks noChangeAspect="1"/>
+          </p:cNvPicPr>
+          <p:nvPr/>
+        </p:nvPicPr>
+        <p:blipFill>
+          <a:blip r:embed="rId2"/>
+          <a:stretch>
+            <a:fillRect/>
+          </a:stretch>
+        </p:blipFill>
+        <p:spPr>
+          <a:xfrm>
+            <a:off x="6583680" y="3032760"/>
+            <a:ext cx="4846320" cy="1615440"/>
+          </a:xfrm>
+          <a:prstGeom prst="rect">
+            <a:avLst/>
+          </a:prstGeom>
+        </p:spPr>
+      </p:pic>
+    </p:spTree>
+  </p:cSld>
+  <p:clrMapOvr>
+    <a:masterClrMapping/>
+  </p:clrMapOvr>
+</p:sld>
+</file>
+
+<file path=ppt/slides/slide14.xml><?xml version="1.0" encoding="utf-8"?>
+<p:sld xmlns:a="http://schemas.openxmlformats.org/drawingml/2006/main" xmlns:p="http://schemas.openxmlformats.org/presentationml/2006/main" xmlns:r="http://schemas.openxmlformats.org/officeDocument/2006/relationships">
+  <p:cSld>
+    <p:bg>
+      <p:bgPr>
+        <a:solidFill>
+          <a:srgbClr val="121214"/>
+        </a:solidFill>
+        <a:effectLst/>
+      </p:bgPr>
+    </p:bg>
+    <p:spTree>
+      <p:nvGrpSpPr>
+        <p:cNvPr id="1" name=""/>
+        <p:cNvGrpSpPr/>
+        <p:nvPr/>
+      </p:nvGrpSpPr>
+      <p:grpSpPr/>
+      <p:sp>
+        <p:nvSpPr>
+          <p:cNvPr id="2" name="TextBox 1"/>
+          <p:cNvSpPr txBox="1"/>
+          <p:nvPr/>
+        </p:nvSpPr>
+        <p:spPr>
+          <a:xfrm>
+            <a:off x="731520" y="365760"/>
+            <a:ext cx="10058400" cy="274320"/>
+          </a:xfrm>
+          <a:prstGeom prst="rect">
+            <a:avLst/>
+          </a:prstGeom>
+          <a:noFill/>
+        </p:spPr>
+        <p:txBody>
+          <a:bodyPr wrap="square" tIns="0" bIns="0" lIns="0" rIns="0">
+            <a:spAutoFit/>
+          </a:bodyPr>
+          <a:lstStyle/>
+          <a:p>
+            <a:pPr>
+              <a:defRPr sz="1000" b="1">
+                <a:solidFill>
+                  <a:srgbClr val="14B8A6"/>
+                </a:solidFill>
+                <a:latin typeface="Arial"/>
+              </a:defRPr>
+            </a:pPr>
+            <a:r>
+              <a:t>MODULE 9: LLMS &amp; TRANSFORMERS</a:t>
+            </a:r>
+          </a:p>
+        </p:txBody>
+      </p:sp>
+      <p:sp>
+        <p:nvSpPr>
+          <p:cNvPr id="3" name="TextBox 2"/>
+          <p:cNvSpPr txBox="1"/>
+          <p:nvPr/>
+        </p:nvSpPr>
+        <p:spPr>
+          <a:xfrm>
+            <a:off x="731520" y="548640"/>
+            <a:ext cx="10058400" cy="731520"/>
+          </a:xfrm>
+          <a:prstGeom prst="rect">
+            <a:avLst/>
+          </a:prstGeom>
+          <a:noFill/>
+        </p:spPr>
+        <p:txBody>
+          <a:bodyPr wrap="square" tIns="0" bIns="0" lIns="0" rIns="0">
+            <a:spAutoFit/>
+          </a:bodyPr>
+          <a:lstStyle/>
+          <a:p>
+            <a:pPr>
+              <a:defRPr sz="3000" b="1">
+                <a:solidFill>
+                  <a:srgbClr val="F8FAFC"/>
+                </a:solidFill>
+                <a:latin typeface="Arial"/>
+              </a:defRPr>
+            </a:pPr>
+            <a:r>
+              <a:t>The Encoder: Self-Attention &amp; Positional Encoding</a:t>
+            </a:r>
+          </a:p>
+        </p:txBody>
+      </p:sp>
+      <p:sp>
+        <p:nvSpPr>
+          <p:cNvPr id="4" name="Rounded Rectangle 3"/>
+          <p:cNvSpPr/>
+          <p:nvPr/>
+        </p:nvSpPr>
+        <p:spPr>
+          <a:xfrm>
+            <a:off x="731520" y="1645920"/>
+            <a:ext cx="5486400" cy="4389120"/>
+          </a:xfrm>
+          <a:prstGeom prst="roundRect">
+            <a:avLst/>
+          </a:prstGeom>
+          <a:solidFill>
+            <a:srgbClr val="1E1E24"/>
+          </a:solidFill>
+          <a:ln w="19050">
+            <a:solidFill>
+              <a:srgbClr val="A855F7"/>
+            </a:solidFill>
+          </a:ln>
+        </p:spPr>
+        <p:style>
+          <a:lnRef idx="1">
+            <a:schemeClr val="accent1"/>
+          </a:lnRef>
+          <a:fillRef idx="3">
+            <a:schemeClr val="accent1"/>
+          </a:fillRef>
+          <a:effectRef idx="2">
+            <a:schemeClr val="accent1"/>
+          </a:effectRef>
+          <a:fontRef idx="minor">
+            <a:schemeClr val="lt1"/>
+          </a:fontRef>
+        </p:style>
+        <p:txBody>
+          <a:bodyPr rtlCol="0" anchor="ctr"/>
+          <a:lstStyle/>
+          <a:p>
+            <a:pPr algn="ctr"/>
+          </a:p>
+        </p:txBody>
+      </p:sp>
+      <p:sp>
+        <p:nvSpPr>
+          <p:cNvPr id="5" name="TextBox 4"/>
+          <p:cNvSpPr txBox="1"/>
+          <p:nvPr/>
+        </p:nvSpPr>
+        <p:spPr>
+          <a:xfrm>
+            <a:off x="914400" y="1828800"/>
+            <a:ext cx="5120640" cy="4023360"/>
+          </a:xfrm>
+          <a:prstGeom prst="rect">
+            <a:avLst/>
+          </a:prstGeom>
+          <a:noFill/>
+        </p:spPr>
+        <p:txBody>
+          <a:bodyPr wrap="square">
+            <a:spAutoFit/>
+          </a:bodyPr>
+          <a:lstStyle/>
           <a:p>
             <a:pPr>
               <a:spcAft>
                 <a:spcPts val="1200"/>
               </a:spcAft>
-              <a:defRPr sz="1600">
-                <a:solidFill>
-                  <a:srgbClr val="A1A1AA"/>
-                </a:solidFill>
-              </a:defRPr>
-            </a:pPr>
-            <a:r>
-              <a:t>4. Emphasize Evaluation: A model scoring 99% accuracy on training data is almost always overfit.</a:t>
-            </a:r>
-          </a:p>
+              <a:defRPr sz="2000" b="1">
+                <a:solidFill>
+                  <a:srgbClr val="14B8A6"/>
+                </a:solidFill>
+                <a:latin typeface="Arial"/>
+              </a:defRPr>
+            </a:pPr>
+            <a:r>
+              <a:t>Parallel Contextual Encoding</a:t>
+            </a:r>
+          </a:p>
+          <a:p>
+            <a:pPr>
+              <a:spcAft>
+                <a:spcPts val="800"/>
+              </a:spcAft>
+              <a:defRPr sz="1300">
+                <a:solidFill>
+                  <a:srgbClr val="A1A1AA"/>
+                </a:solidFill>
+                <a:latin typeface="Arial"/>
+              </a:defRPr>
+            </a:pPr>
+            <a:r>
+              <a:t>Positional Encoding: Adds sine/cosine wave patterns to input embeddings to preserve token sequence order.</a:t>
+            </a:r>
+          </a:p>
+          <a:p>
+            <a:pPr>
+              <a:spcAft>
+                <a:spcPts val="800"/>
+              </a:spcAft>
+              <a:defRPr sz="1300">
+                <a:solidFill>
+                  <a:srgbClr val="A1A1AA"/>
+                </a:solidFill>
+                <a:latin typeface="Arial"/>
+              </a:defRPr>
+            </a:pPr>
+            <a:r>
+              <a:t>Scaled Dot-Product Self-Attention: Projects input matrices into Query (Q), Key (K), and Value (V) representations.</a:t>
+            </a:r>
+          </a:p>
+          <a:p>
+            <a:pPr>
+              <a:spcAft>
+                <a:spcPts val="800"/>
+              </a:spcAft>
+              <a:defRPr sz="1300">
+                <a:solidFill>
+                  <a:srgbClr val="A1A1AA"/>
+                </a:solidFill>
+                <a:latin typeface="Arial"/>
+              </a:defRPr>
+            </a:pPr>
+            <a:r>
+              <a:t>Alignment Formula: Attention(Q, K, V) = Softmax(Q K^T / sqrt(d_k)) V. Scales by sqrt(d_k) to prevent gradient vanishing.</a:t>
+            </a:r>
+          </a:p>
+          <a:p>
+            <a:pPr>
+              <a:spcAft>
+                <a:spcPts val="800"/>
+              </a:spcAft>
+              <a:defRPr sz="1300">
+                <a:solidFill>
+                  <a:srgbClr val="A1A1AA"/>
+                </a:solidFill>
+                <a:latin typeface="Arial"/>
+              </a:defRPr>
+            </a:pPr>
+            <a:r>
+              <a:t>Context Resolution: Dynamically shifts a word's vector representation based on surrounding tokens (e.g. 'bank' of river vs. money).</a:t>
+            </a:r>
+          </a:p>
+          <a:p>
+            <a:pPr>
+              <a:spcAft>
+                <a:spcPts val="800"/>
+              </a:spcAft>
+              <a:defRPr sz="1300">
+                <a:solidFill>
+                  <a:srgbClr val="A1A1AA"/>
+                </a:solidFill>
+                <a:latin typeface="Arial"/>
+              </a:defRPr>
+            </a:pPr>
+            <a:r>
+              <a:t>Visual: Sinusoidal Positional Encoding matrix heatmap.</a:t>
+            </a:r>
+          </a:p>
+        </p:txBody>
+      </p:sp>
+      <p:pic>
+        <p:nvPicPr>
+          <p:cNvPr id="6" name="Picture 5" descr="llm_3_positional_encoding.png"/>
+          <p:cNvPicPr>
+            <a:picLocks noChangeAspect="1"/>
+          </p:cNvPicPr>
+          <p:nvPr/>
+        </p:nvPicPr>
+        <p:blipFill>
+          <a:blip r:embed="rId2"/>
+          <a:stretch>
+            <a:fillRect/>
+          </a:stretch>
+        </p:blipFill>
+        <p:spPr>
+          <a:xfrm>
+            <a:off x="6583680" y="2023110"/>
+            <a:ext cx="4846320" cy="3634740"/>
+          </a:xfrm>
+          <a:prstGeom prst="rect">
+            <a:avLst/>
+          </a:prstGeom>
+        </p:spPr>
+      </p:pic>
+    </p:spTree>
+  </p:cSld>
+  <p:clrMapOvr>
+    <a:masterClrMapping/>
+  </p:clrMapOvr>
+</p:sld>
+</file>
+
+<file path=ppt/slides/slide15.xml><?xml version="1.0" encoding="utf-8"?>
+<p:sld xmlns:a="http://schemas.openxmlformats.org/drawingml/2006/main" xmlns:p="http://schemas.openxmlformats.org/presentationml/2006/main" xmlns:r="http://schemas.openxmlformats.org/officeDocument/2006/relationships">
+  <p:cSld>
+    <p:bg>
+      <p:bgPr>
+        <a:solidFill>
+          <a:srgbClr val="121214"/>
+        </a:solidFill>
+        <a:effectLst/>
+      </p:bgPr>
+    </p:bg>
+    <p:spTree>
+      <p:nvGrpSpPr>
+        <p:cNvPr id="1" name=""/>
+        <p:cNvGrpSpPr/>
+        <p:nvPr/>
+      </p:nvGrpSpPr>
+      <p:grpSpPr/>
+      <p:sp>
+        <p:nvSpPr>
+          <p:cNvPr id="2" name="TextBox 1"/>
+          <p:cNvSpPr txBox="1"/>
+          <p:nvPr/>
+        </p:nvSpPr>
+        <p:spPr>
+          <a:xfrm>
+            <a:off x="731520" y="365760"/>
+            <a:ext cx="10058400" cy="274320"/>
+          </a:xfrm>
+          <a:prstGeom prst="rect">
+            <a:avLst/>
+          </a:prstGeom>
+          <a:noFill/>
+        </p:spPr>
+        <p:txBody>
+          <a:bodyPr wrap="square" tIns="0" bIns="0" lIns="0" rIns="0">
+            <a:spAutoFit/>
+          </a:bodyPr>
+          <a:lstStyle/>
+          <a:p>
+            <a:pPr>
+              <a:defRPr sz="1000" b="1">
+                <a:solidFill>
+                  <a:srgbClr val="14B8A6"/>
+                </a:solidFill>
+                <a:latin typeface="Arial"/>
+              </a:defRPr>
+            </a:pPr>
+            <a:r>
+              <a:t>MODULE 9: LLMS &amp; TRANSFORMERS</a:t>
+            </a:r>
+          </a:p>
+        </p:txBody>
+      </p:sp>
+      <p:sp>
+        <p:nvSpPr>
+          <p:cNvPr id="3" name="TextBox 2"/>
+          <p:cNvSpPr txBox="1"/>
+          <p:nvPr/>
+        </p:nvSpPr>
+        <p:spPr>
+          <a:xfrm>
+            <a:off x="731520" y="548640"/>
+            <a:ext cx="10058400" cy="731520"/>
+          </a:xfrm>
+          <a:prstGeom prst="rect">
+            <a:avLst/>
+          </a:prstGeom>
+          <a:noFill/>
+        </p:spPr>
+        <p:txBody>
+          <a:bodyPr wrap="square" tIns="0" bIns="0" lIns="0" rIns="0">
+            <a:spAutoFit/>
+          </a:bodyPr>
+          <a:lstStyle/>
+          <a:p>
+            <a:pPr>
+              <a:defRPr sz="3000" b="1">
+                <a:solidFill>
+                  <a:srgbClr val="F8FAFC"/>
+                </a:solidFill>
+                <a:latin typeface="Arial"/>
+              </a:defRPr>
+            </a:pPr>
+            <a:r>
+              <a:t>The Decoder: Causal Masking &amp; Cross-Attention</a:t>
+            </a:r>
+          </a:p>
+        </p:txBody>
+      </p:sp>
+      <p:sp>
+        <p:nvSpPr>
+          <p:cNvPr id="4" name="Rounded Rectangle 3"/>
+          <p:cNvSpPr/>
+          <p:nvPr/>
+        </p:nvSpPr>
+        <p:spPr>
+          <a:xfrm>
+            <a:off x="731520" y="1645920"/>
+            <a:ext cx="5486400" cy="4389120"/>
+          </a:xfrm>
+          <a:prstGeom prst="roundRect">
+            <a:avLst/>
+          </a:prstGeom>
+          <a:solidFill>
+            <a:srgbClr val="1E1E24"/>
+          </a:solidFill>
+          <a:ln w="19050">
+            <a:solidFill>
+              <a:srgbClr val="F59E0B"/>
+            </a:solidFill>
+          </a:ln>
+        </p:spPr>
+        <p:style>
+          <a:lnRef idx="1">
+            <a:schemeClr val="accent1"/>
+          </a:lnRef>
+          <a:fillRef idx="3">
+            <a:schemeClr val="accent1"/>
+          </a:fillRef>
+          <a:effectRef idx="2">
+            <a:schemeClr val="accent1"/>
+          </a:effectRef>
+          <a:fontRef idx="minor">
+            <a:schemeClr val="lt1"/>
+          </a:fontRef>
+        </p:style>
+        <p:txBody>
+          <a:bodyPr rtlCol="0" anchor="ctr"/>
+          <a:lstStyle/>
+          <a:p>
+            <a:pPr algn="ctr"/>
+          </a:p>
+        </p:txBody>
+      </p:sp>
+      <p:sp>
+        <p:nvSpPr>
+          <p:cNvPr id="5" name="TextBox 4"/>
+          <p:cNvSpPr txBox="1"/>
+          <p:nvPr/>
+        </p:nvSpPr>
+        <p:spPr>
+          <a:xfrm>
+            <a:off x="914400" y="1828800"/>
+            <a:ext cx="5120640" cy="4023360"/>
+          </a:xfrm>
+          <a:prstGeom prst="rect">
+            <a:avLst/>
+          </a:prstGeom>
+          <a:noFill/>
+        </p:spPr>
+        <p:txBody>
+          <a:bodyPr wrap="square">
+            <a:spAutoFit/>
+          </a:bodyPr>
+          <a:lstStyle/>
           <a:p>
             <a:pPr>
               <a:spcAft>
                 <a:spcPts val="1200"/>
               </a:spcAft>
-              <a:defRPr sz="1600">
-                <a:solidFill>
-                  <a:srgbClr val="A1A1AA"/>
-                </a:solidFill>
-              </a:defRPr>
-            </a:pPr>
-            <a:r>
-              <a:t>5. Hands-on labs: Have students tune K-Means centroids or Random Forest depths on standard datasets (Iris/Titanic).</a:t>
-            </a:r>
-          </a:p>
-        </p:txBody>
-      </p:sp>
+              <a:defRPr sz="2000" b="1">
+                <a:solidFill>
+                  <a:srgbClr val="14B8A6"/>
+                </a:solidFill>
+                <a:latin typeface="Arial"/>
+              </a:defRPr>
+            </a:pPr>
+            <a:r>
+              <a:t>Autoregressive Target Generation</a:t>
+            </a:r>
+          </a:p>
+          <a:p>
+            <a:pPr>
+              <a:spcAft>
+                <a:spcPts val="800"/>
+              </a:spcAft>
+              <a:defRPr sz="1300">
+                <a:solidFill>
+                  <a:srgbClr val="A1A1AA"/>
+                </a:solidFill>
+                <a:latin typeface="Arial"/>
+              </a:defRPr>
+            </a:pPr>
+            <a:r>
+              <a:t>Autoregressive Generation: Predicts tokens sequentially, appending prior outputs as inputs for successive steps.</a:t>
+            </a:r>
+          </a:p>
+          <a:p>
+            <a:pPr>
+              <a:spcAft>
+                <a:spcPts val="800"/>
+              </a:spcAft>
+              <a:defRPr sz="1300">
+                <a:solidFill>
+                  <a:srgbClr val="A1A1AA"/>
+                </a:solidFill>
+                <a:latin typeface="Arial"/>
+              </a:defRPr>
+            </a:pPr>
+            <a:r>
+              <a:t>Causal Masking: Adds a lower-triangular mask (-infinity for future positions) to attention scores prior to softmax.</a:t>
+            </a:r>
+          </a:p>
+          <a:p>
+            <a:pPr>
+              <a:spcAft>
+                <a:spcPts val="800"/>
+              </a:spcAft>
+              <a:defRPr sz="1300">
+                <a:solidFill>
+                  <a:srgbClr val="A1A1AA"/>
+                </a:solidFill>
+                <a:latin typeface="Arial"/>
+              </a:defRPr>
+            </a:pPr>
+            <a:r>
+              <a:t>Look-Ahead Prevention: Mathematically sets attention weights to future tokens to exactly 0, preventing future-leakage.</a:t>
+            </a:r>
+          </a:p>
+          <a:p>
+            <a:pPr>
+              <a:spcAft>
+                <a:spcPts val="800"/>
+              </a:spcAft>
+              <a:defRPr sz="1300">
+                <a:solidFill>
+                  <a:srgbClr val="A1A1AA"/>
+                </a:solidFill>
+                <a:latin typeface="Arial"/>
+              </a:defRPr>
+            </a:pPr>
+            <a:r>
+              <a:t>Encoder-Decoder Cross-Attention: Decoder queries (Q) attend to Encoder keys (K) and values (V), linking target to source.</a:t>
+            </a:r>
+          </a:p>
+          <a:p>
+            <a:pPr>
+              <a:spcAft>
+                <a:spcPts val="800"/>
+              </a:spcAft>
+              <a:defRPr sz="1300">
+                <a:solidFill>
+                  <a:srgbClr val="A1A1AA"/>
+                </a:solidFill>
+                <a:latin typeface="Arial"/>
+              </a:defRPr>
+            </a:pPr>
+            <a:r>
+              <a:t>Visual: Decoder Causal Mask lower-triangular attention boundaries.</a:t>
+            </a:r>
+          </a:p>
+        </p:txBody>
+      </p:sp>
+      <p:pic>
+        <p:nvPicPr>
+          <p:cNvPr id="6" name="Picture 5" descr="llm_4_causal_mask.png"/>
+          <p:cNvPicPr>
+            <a:picLocks noChangeAspect="1"/>
+          </p:cNvPicPr>
+          <p:nvPr/>
+        </p:nvPicPr>
+        <p:blipFill>
+          <a:blip r:embed="rId2"/>
+          <a:stretch>
+            <a:fillRect/>
+          </a:stretch>
+        </p:blipFill>
+        <p:spPr>
+          <a:xfrm>
+            <a:off x="6583680" y="1763486"/>
+            <a:ext cx="4846320" cy="4153988"/>
+          </a:xfrm>
+          <a:prstGeom prst="rect">
+            <a:avLst/>
+          </a:prstGeom>
+        </p:spPr>
+      </p:pic>
+    </p:spTree>
+  </p:cSld>
+  <p:clrMapOvr>
+    <a:masterClrMapping/>
+  </p:clrMapOvr>
+</p:sld>
+</file>
+
+<file path=ppt/slides/slide16.xml><?xml version="1.0" encoding="utf-8"?>
+<p:sld xmlns:a="http://schemas.openxmlformats.org/drawingml/2006/main" xmlns:p="http://schemas.openxmlformats.org/presentationml/2006/main" xmlns:r="http://schemas.openxmlformats.org/officeDocument/2006/relationships">
+  <p:cSld>
+    <p:bg>
+      <p:bgPr>
+        <a:solidFill>
+          <a:srgbClr val="121214"/>
+        </a:solidFill>
+        <a:effectLst/>
+      </p:bgPr>
+    </p:bg>
+    <p:spTree>
+      <p:nvGrpSpPr>
+        <p:cNvPr id="1" name=""/>
+        <p:cNvGrpSpPr/>
+        <p:nvPr/>
+      </p:nvGrpSpPr>
+      <p:grpSpPr/>
+      <p:sp>
+        <p:nvSpPr>
+          <p:cNvPr id="2" name="TextBox 1"/>
+          <p:cNvSpPr txBox="1"/>
+          <p:nvPr/>
+        </p:nvSpPr>
+        <p:spPr>
+          <a:xfrm>
+            <a:off x="731520" y="365760"/>
+            <a:ext cx="10058400" cy="274320"/>
+          </a:xfrm>
+          <a:prstGeom prst="rect">
+            <a:avLst/>
+          </a:prstGeom>
+          <a:noFill/>
+        </p:spPr>
+        <p:txBody>
+          <a:bodyPr wrap="square" tIns="0" bIns="0" lIns="0" rIns="0">
+            <a:spAutoFit/>
+          </a:bodyPr>
+          <a:lstStyle/>
+          <a:p>
+            <a:pPr>
+              <a:defRPr sz="1000" b="1">
+                <a:solidFill>
+                  <a:srgbClr val="14B8A6"/>
+                </a:solidFill>
+                <a:latin typeface="Arial"/>
+              </a:defRPr>
+            </a:pPr>
+            <a:r>
+              <a:t>MODULE 9: LLMS &amp; TRANSFORMERS</a:t>
+            </a:r>
+          </a:p>
+        </p:txBody>
+      </p:sp>
+      <p:sp>
+        <p:nvSpPr>
+          <p:cNvPr id="3" name="TextBox 2"/>
+          <p:cNvSpPr txBox="1"/>
+          <p:nvPr/>
+        </p:nvSpPr>
+        <p:spPr>
+          <a:xfrm>
+            <a:off x="731520" y="548640"/>
+            <a:ext cx="10058400" cy="731520"/>
+          </a:xfrm>
+          <a:prstGeom prst="rect">
+            <a:avLst/>
+          </a:prstGeom>
+          <a:noFill/>
+        </p:spPr>
+        <p:txBody>
+          <a:bodyPr wrap="square" tIns="0" bIns="0" lIns="0" rIns="0">
+            <a:spAutoFit/>
+          </a:bodyPr>
+          <a:lstStyle/>
+          <a:p>
+            <a:pPr>
+              <a:defRPr sz="3000" b="1">
+                <a:solidFill>
+                  <a:srgbClr val="F8FAFC"/>
+                </a:solidFill>
+                <a:latin typeface="Arial"/>
+              </a:defRPr>
+            </a:pPr>
+            <a:r>
+              <a:t>End-to-End Seq2Seq Transformer Model</a:t>
+            </a:r>
+          </a:p>
+        </p:txBody>
+      </p:sp>
+      <p:sp>
+        <p:nvSpPr>
+          <p:cNvPr id="4" name="Rounded Rectangle 3"/>
+          <p:cNvSpPr/>
+          <p:nvPr/>
+        </p:nvSpPr>
+        <p:spPr>
+          <a:xfrm>
+            <a:off x="731520" y="1645920"/>
+            <a:ext cx="5486400" cy="4389120"/>
+          </a:xfrm>
+          <a:prstGeom prst="roundRect">
+            <a:avLst/>
+          </a:prstGeom>
+          <a:solidFill>
+            <a:srgbClr val="1E1E24"/>
+          </a:solidFill>
+          <a:ln w="19050">
+            <a:solidFill>
+              <a:srgbClr val="14B8A6"/>
+            </a:solidFill>
+          </a:ln>
+        </p:spPr>
+        <p:style>
+          <a:lnRef idx="1">
+            <a:schemeClr val="accent1"/>
+          </a:lnRef>
+          <a:fillRef idx="3">
+            <a:schemeClr val="accent1"/>
+          </a:fillRef>
+          <a:effectRef idx="2">
+            <a:schemeClr val="accent1"/>
+          </a:effectRef>
+          <a:fontRef idx="minor">
+            <a:schemeClr val="lt1"/>
+          </a:fontRef>
+        </p:style>
+        <p:txBody>
+          <a:bodyPr rtlCol="0" anchor="ctr"/>
+          <a:lstStyle/>
+          <a:p>
+            <a:pPr algn="ctr"/>
+          </a:p>
+        </p:txBody>
+      </p:sp>
+      <p:sp>
+        <p:nvSpPr>
+          <p:cNvPr id="5" name="TextBox 4"/>
+          <p:cNvSpPr txBox="1"/>
+          <p:nvPr/>
+        </p:nvSpPr>
+        <p:spPr>
+          <a:xfrm>
+            <a:off x="914400" y="1828800"/>
+            <a:ext cx="5120640" cy="4023360"/>
+          </a:xfrm>
+          <a:prstGeom prst="rect">
+            <a:avLst/>
+          </a:prstGeom>
+          <a:noFill/>
+        </p:spPr>
+        <p:txBody>
+          <a:bodyPr wrap="square">
+            <a:spAutoFit/>
+          </a:bodyPr>
+          <a:lstStyle/>
+          <a:p>
+            <a:pPr>
+              <a:spcAft>
+                <a:spcPts val="1200"/>
+              </a:spcAft>
+              <a:defRPr sz="2000" b="1">
+                <a:solidFill>
+                  <a:srgbClr val="14B8A6"/>
+                </a:solidFill>
+                <a:latin typeface="Arial"/>
+              </a:defRPr>
+            </a:pPr>
+            <a:r>
+              <a:t>Bilingual Machine Translation Model</a:t>
+            </a:r>
+          </a:p>
+          <a:p>
+            <a:pPr>
+              <a:spcAft>
+                <a:spcPts val="800"/>
+              </a:spcAft>
+              <a:defRPr sz="1300">
+                <a:solidFill>
+                  <a:srgbClr val="A1A1AA"/>
+                </a:solidFill>
+                <a:latin typeface="Arial"/>
+              </a:defRPr>
+            </a:pPr>
+            <a:r>
+              <a:t>Seq2Seq Architecture: Couples an Encoder (source comprehension) with a Decoder (target autoregressive generation).</a:t>
+            </a:r>
+          </a:p>
+          <a:p>
+            <a:pPr>
+              <a:spcAft>
+                <a:spcPts val="800"/>
+              </a:spcAft>
+              <a:defRPr sz="1300">
+                <a:solidFill>
+                  <a:srgbClr val="A1A1AA"/>
+                </a:solidFill>
+                <a:latin typeface="Arial"/>
+              </a:defRPr>
+            </a:pPr>
+            <a:r>
+              <a:t>Pure Python Implementation: Standard tokenizer, embeddings, encoder self-attention, and decoder cross-attention blocks.</a:t>
+            </a:r>
+          </a:p>
+          <a:p>
+            <a:pPr>
+              <a:spcAft>
+                <a:spcPts val="800"/>
+              </a:spcAft>
+              <a:defRPr sz="1300">
+                <a:solidFill>
+                  <a:srgbClr val="A1A1AA"/>
+                </a:solidFill>
+                <a:latin typeface="Arial"/>
+              </a:defRPr>
+            </a:pPr>
+            <a:r>
+              <a:t>Greedy Decoding Loop: Iterates forward passes, selecting the token with the maximum probability until a stop token is reached.</a:t>
+            </a:r>
+          </a:p>
+          <a:p>
+            <a:pPr>
+              <a:spcAft>
+                <a:spcPts val="800"/>
+              </a:spcAft>
+              <a:defRPr sz="1300">
+                <a:solidFill>
+                  <a:srgbClr val="A1A1AA"/>
+                </a:solidFill>
+                <a:latin typeface="Arial"/>
+              </a:defRPr>
+            </a:pPr>
+            <a:r>
+              <a:t>Teacher Forcing: Feed actual ground truth targets into the decoder during training to stabilize parameters.</a:t>
+            </a:r>
+          </a:p>
+          <a:p>
+            <a:pPr>
+              <a:spcAft>
+                <a:spcPts val="800"/>
+              </a:spcAft>
+              <a:defRPr sz="1300">
+                <a:solidFill>
+                  <a:srgbClr val="A1A1AA"/>
+                </a:solidFill>
+                <a:latin typeface="Arial"/>
+              </a:defRPr>
+            </a:pPr>
+            <a:r>
+              <a:t>Visual: Attention alignment weights mapping English to Spanish.</a:t>
+            </a:r>
+          </a:p>
+        </p:txBody>
+      </p:sp>
+      <p:pic>
+        <p:nvPicPr>
+          <p:cNvPr id="6" name="Picture 5" descr="llm_5_attention_alignment.png"/>
+          <p:cNvPicPr>
+            <a:picLocks noChangeAspect="1"/>
+          </p:cNvPicPr>
+          <p:nvPr/>
+        </p:nvPicPr>
+        <p:blipFill>
+          <a:blip r:embed="rId2"/>
+          <a:stretch>
+            <a:fillRect/>
+          </a:stretch>
+        </p:blipFill>
+        <p:spPr>
+          <a:xfrm>
+            <a:off x="6583680" y="2023110"/>
+            <a:ext cx="4846320" cy="3634740"/>
+          </a:xfrm>
+          <a:prstGeom prst="rect">
+            <a:avLst/>
+          </a:prstGeom>
+        </p:spPr>
+      </p:pic>
+    </p:spTree>
+  </p:cSld>
+  <p:clrMapOvr>
+    <a:masterClrMapping/>
+  </p:clrMapOvr>
+</p:sld>
+</file>
+
+<file path=ppt/slides/slide17.xml><?xml version="1.0" encoding="utf-8"?>
+<p:sld xmlns:a="http://schemas.openxmlformats.org/drawingml/2006/main" xmlns:p="http://schemas.openxmlformats.org/presentationml/2006/main" xmlns:r="http://schemas.openxmlformats.org/officeDocument/2006/relationships">
+  <p:cSld>
+    <p:bg>
+      <p:bgPr>
+        <a:solidFill>
+          <a:srgbClr val="121214"/>
+        </a:solidFill>
+        <a:effectLst/>
+      </p:bgPr>
+    </p:bg>
+    <p:spTree>
+      <p:nvGrpSpPr>
+        <p:cNvPr id="1" name=""/>
+        <p:cNvGrpSpPr/>
+        <p:nvPr/>
+      </p:nvGrpSpPr>
+      <p:grpSpPr/>
+      <p:sp>
+        <p:nvSpPr>
+          <p:cNvPr id="2" name="TextBox 1"/>
+          <p:cNvSpPr txBox="1"/>
+          <p:nvPr/>
+        </p:nvSpPr>
+        <p:spPr>
+          <a:xfrm>
+            <a:off x="731520" y="365760"/>
+            <a:ext cx="10058400" cy="274320"/>
+          </a:xfrm>
+          <a:prstGeom prst="rect">
+            <a:avLst/>
+          </a:prstGeom>
+          <a:noFill/>
+        </p:spPr>
+        <p:txBody>
+          <a:bodyPr wrap="square" tIns="0" bIns="0" lIns="0" rIns="0">
+            <a:spAutoFit/>
+          </a:bodyPr>
+          <a:lstStyle/>
+          <a:p>
+            <a:pPr>
+              <a:defRPr sz="1000" b="1">
+                <a:solidFill>
+                  <a:srgbClr val="14B8A6"/>
+                </a:solidFill>
+                <a:latin typeface="Arial"/>
+              </a:defRPr>
+            </a:pPr>
+            <a:r>
+              <a:t>APPENDIX: GLOSSARY</a:t>
+            </a:r>
+          </a:p>
+        </p:txBody>
+      </p:sp>
+      <p:sp>
+        <p:nvSpPr>
+          <p:cNvPr id="3" name="TextBox 2"/>
+          <p:cNvSpPr txBox="1"/>
+          <p:nvPr/>
+        </p:nvSpPr>
+        <p:spPr>
+          <a:xfrm>
+            <a:off x="731520" y="548640"/>
+            <a:ext cx="10058400" cy="731520"/>
+          </a:xfrm>
+          <a:prstGeom prst="rect">
+            <a:avLst/>
+          </a:prstGeom>
+          <a:noFill/>
+        </p:spPr>
+        <p:txBody>
+          <a:bodyPr wrap="square" tIns="0" bIns="0" lIns="0" rIns="0">
+            <a:spAutoFit/>
+          </a:bodyPr>
+          <a:lstStyle/>
+          <a:p>
+            <a:pPr>
+              <a:defRPr sz="3000" b="1">
+                <a:solidFill>
+                  <a:srgbClr val="F8FAFC"/>
+                </a:solidFill>
+                <a:latin typeface="Arial"/>
+              </a:defRPr>
+            </a:pPr>
+            <a:r>
+              <a:t>Appendix: Centroid, Hyperplane &amp; Residuals</a:t>
+            </a:r>
+          </a:p>
+        </p:txBody>
+      </p:sp>
+      <p:sp>
+        <p:nvSpPr>
+          <p:cNvPr id="4" name="Rounded Rectangle 3"/>
+          <p:cNvSpPr/>
+          <p:nvPr/>
+        </p:nvSpPr>
+        <p:spPr>
+          <a:xfrm>
+            <a:off x="731520" y="1645920"/>
+            <a:ext cx="5486400" cy="4389120"/>
+          </a:xfrm>
+          <a:prstGeom prst="roundRect">
+            <a:avLst/>
+          </a:prstGeom>
+          <a:solidFill>
+            <a:srgbClr val="1E1E24"/>
+          </a:solidFill>
+          <a:ln w="19050">
+            <a:solidFill>
+              <a:srgbClr val="6366F1"/>
+            </a:solidFill>
+          </a:ln>
+        </p:spPr>
+        <p:style>
+          <a:lnRef idx="1">
+            <a:schemeClr val="accent1"/>
+          </a:lnRef>
+          <a:fillRef idx="3">
+            <a:schemeClr val="accent1"/>
+          </a:fillRef>
+          <a:effectRef idx="2">
+            <a:schemeClr val="accent1"/>
+          </a:effectRef>
+          <a:fontRef idx="minor">
+            <a:schemeClr val="lt1"/>
+          </a:fontRef>
+        </p:style>
+        <p:txBody>
+          <a:bodyPr rtlCol="0" anchor="ctr"/>
+          <a:lstStyle/>
+          <a:p>
+            <a:pPr algn="ctr"/>
+          </a:p>
+        </p:txBody>
+      </p:sp>
+      <p:sp>
+        <p:nvSpPr>
+          <p:cNvPr id="5" name="TextBox 4"/>
+          <p:cNvSpPr txBox="1"/>
+          <p:nvPr/>
+        </p:nvSpPr>
+        <p:spPr>
+          <a:xfrm>
+            <a:off x="914400" y="1828800"/>
+            <a:ext cx="5120640" cy="4023360"/>
+          </a:xfrm>
+          <a:prstGeom prst="rect">
+            <a:avLst/>
+          </a:prstGeom>
+          <a:noFill/>
+        </p:spPr>
+        <p:txBody>
+          <a:bodyPr wrap="square">
+            <a:spAutoFit/>
+          </a:bodyPr>
+          <a:lstStyle/>
+          <a:p>
+            <a:pPr>
+              <a:spcAft>
+                <a:spcPts val="1200"/>
+              </a:spcAft>
+              <a:defRPr sz="2000" b="1">
+                <a:solidFill>
+                  <a:srgbClr val="14B8A6"/>
+                </a:solidFill>
+                <a:latin typeface="Arial"/>
+              </a:defRPr>
+            </a:pPr>
+            <a:r>
+              <a:t>Mathematical Fundamentals</a:t>
+            </a:r>
+          </a:p>
+          <a:p>
+            <a:pPr>
+              <a:spcAft>
+                <a:spcPts val="800"/>
+              </a:spcAft>
+              <a:defRPr sz="1300">
+                <a:solidFill>
+                  <a:srgbClr val="A1A1AA"/>
+                </a:solidFill>
+                <a:latin typeface="Arial"/>
+              </a:defRPr>
+            </a:pPr>
+            <a:r>
+              <a:t>Centroid: The geometric center of a cluster of coordinates. Computed as the mean vector: mu = 1/N * sum(x_i).</a:t>
+            </a:r>
+          </a:p>
+          <a:p>
+            <a:pPr>
+              <a:spcAft>
+                <a:spcPts val="800"/>
+              </a:spcAft>
+              <a:defRPr sz="1300">
+                <a:solidFill>
+                  <a:srgbClr val="A1A1AA"/>
+                </a:solidFill>
+                <a:latin typeface="Arial"/>
+              </a:defRPr>
+            </a:pPr>
+            <a:r>
+              <a:t>Hyperplane: A linear boundary of dimension D-1 that separates a D-dimensional space: w^T * x + b = 0.</a:t>
+            </a:r>
+          </a:p>
+          <a:p>
+            <a:pPr>
+              <a:spcAft>
+                <a:spcPts val="800"/>
+              </a:spcAft>
+              <a:defRPr sz="1300">
+                <a:solidFill>
+                  <a:srgbClr val="A1A1AA"/>
+                </a:solidFill>
+                <a:latin typeface="Arial"/>
+              </a:defRPr>
+            </a:pPr>
+            <a:r>
+              <a:t>Margin: The distance between separating hyperplane and the closest support vectors: 2 / ||w||.</a:t>
+            </a:r>
+          </a:p>
+          <a:p>
+            <a:pPr>
+              <a:spcAft>
+                <a:spcPts val="800"/>
+              </a:spcAft>
+              <a:defRPr sz="1300">
+                <a:solidFill>
+                  <a:srgbClr val="A1A1AA"/>
+                </a:solidFill>
+                <a:latin typeface="Arial"/>
+              </a:defRPr>
+            </a:pPr>
+            <a:r>
+              <a:t>Residual: The difference between actual and predicted target values: e_i = y_i - y_hat_i.</a:t>
+            </a:r>
+          </a:p>
+          <a:p>
+            <a:pPr>
+              <a:spcAft>
+                <a:spcPts val="800"/>
+              </a:spcAft>
+              <a:defRPr sz="1300">
+                <a:solidFill>
+                  <a:srgbClr val="A1A1AA"/>
+                </a:solidFill>
+                <a:latin typeface="Arial"/>
+              </a:defRPr>
+            </a:pPr>
+            <a:r>
+              <a:t>Visual: Side-by-side plots of Centroid coordinate mean, SVM margins/support-vectors, and OLS regression residuals.</a:t>
+            </a:r>
+          </a:p>
+        </p:txBody>
+      </p:sp>
+      <p:pic>
+        <p:nvPicPr>
+          <p:cNvPr id="6" name="Picture 5" descr="glossary_math_concepts.png"/>
+          <p:cNvPicPr>
+            <a:picLocks noChangeAspect="1"/>
+          </p:cNvPicPr>
+          <p:nvPr/>
+        </p:nvPicPr>
+        <p:blipFill>
+          <a:blip r:embed="rId2"/>
+          <a:stretch>
+            <a:fillRect/>
+          </a:stretch>
+        </p:blipFill>
+        <p:spPr>
+          <a:xfrm>
+            <a:off x="6812280" y="1645920"/>
+            <a:ext cx="4389120" cy="4389120"/>
+          </a:xfrm>
+          <a:prstGeom prst="rect">
+            <a:avLst/>
+          </a:prstGeom>
+        </p:spPr>
+      </p:pic>
+    </p:spTree>
+  </p:cSld>
+  <p:clrMapOvr>
+    <a:masterClrMapping/>
+  </p:clrMapOvr>
+</p:sld>
+</file>
+
+<file path=ppt/slides/slide18.xml><?xml version="1.0" encoding="utf-8"?>
+<p:sld xmlns:a="http://schemas.openxmlformats.org/drawingml/2006/main" xmlns:p="http://schemas.openxmlformats.org/presentationml/2006/main" xmlns:r="http://schemas.openxmlformats.org/officeDocument/2006/relationships">
+  <p:cSld>
+    <p:bg>
+      <p:bgPr>
+        <a:solidFill>
+          <a:srgbClr val="121214"/>
+        </a:solidFill>
+        <a:effectLst/>
+      </p:bgPr>
+    </p:bg>
+    <p:spTree>
+      <p:nvGrpSpPr>
+        <p:cNvPr id="1" name=""/>
+        <p:cNvGrpSpPr/>
+        <p:nvPr/>
+      </p:nvGrpSpPr>
+      <p:grpSpPr/>
+      <p:sp>
+        <p:nvSpPr>
+          <p:cNvPr id="2" name="TextBox 1"/>
+          <p:cNvSpPr txBox="1"/>
+          <p:nvPr/>
+        </p:nvSpPr>
+        <p:spPr>
+          <a:xfrm>
+            <a:off x="731520" y="365760"/>
+            <a:ext cx="10058400" cy="274320"/>
+          </a:xfrm>
+          <a:prstGeom prst="rect">
+            <a:avLst/>
+          </a:prstGeom>
+          <a:noFill/>
+        </p:spPr>
+        <p:txBody>
+          <a:bodyPr wrap="square" tIns="0" bIns="0" lIns="0" rIns="0">
+            <a:spAutoFit/>
+          </a:bodyPr>
+          <a:lstStyle/>
+          <a:p>
+            <a:pPr>
+              <a:defRPr sz="1000" b="1">
+                <a:solidFill>
+                  <a:srgbClr val="14B8A6"/>
+                </a:solidFill>
+                <a:latin typeface="Arial"/>
+              </a:defRPr>
+            </a:pPr>
+            <a:r>
+              <a:t>APPENDIX: GLOSSARY</a:t>
+            </a:r>
+          </a:p>
+        </p:txBody>
+      </p:sp>
+      <p:sp>
+        <p:nvSpPr>
+          <p:cNvPr id="3" name="TextBox 2"/>
+          <p:cNvSpPr txBox="1"/>
+          <p:nvPr/>
+        </p:nvSpPr>
+        <p:spPr>
+          <a:xfrm>
+            <a:off x="731520" y="548640"/>
+            <a:ext cx="10058400" cy="731520"/>
+          </a:xfrm>
+          <a:prstGeom prst="rect">
+            <a:avLst/>
+          </a:prstGeom>
+          <a:noFill/>
+        </p:spPr>
+        <p:txBody>
+          <a:bodyPr wrap="square" tIns="0" bIns="0" lIns="0" rIns="0">
+            <a:spAutoFit/>
+          </a:bodyPr>
+          <a:lstStyle/>
+          <a:p>
+            <a:pPr>
+              <a:defRPr sz="3000" b="1">
+                <a:solidFill>
+                  <a:srgbClr val="F8FAFC"/>
+                </a:solidFill>
+                <a:latin typeface="Arial"/>
+              </a:defRPr>
+            </a:pPr>
+            <a:r>
+              <a:t>Appendix: Normalization &amp; Regularization</a:t>
+            </a:r>
+          </a:p>
+        </p:txBody>
+      </p:sp>
+      <p:sp>
+        <p:nvSpPr>
+          <p:cNvPr id="4" name="Rounded Rectangle 3"/>
+          <p:cNvSpPr/>
+          <p:nvPr/>
+        </p:nvSpPr>
+        <p:spPr>
+          <a:xfrm>
+            <a:off x="731520" y="1645920"/>
+            <a:ext cx="5486400" cy="4389120"/>
+          </a:xfrm>
+          <a:prstGeom prst="roundRect">
+            <a:avLst/>
+          </a:prstGeom>
+          <a:solidFill>
+            <a:srgbClr val="1E1E24"/>
+          </a:solidFill>
+          <a:ln w="19050">
+            <a:solidFill>
+              <a:srgbClr val="14B8A6"/>
+            </a:solidFill>
+          </a:ln>
+        </p:spPr>
+        <p:style>
+          <a:lnRef idx="1">
+            <a:schemeClr val="accent1"/>
+          </a:lnRef>
+          <a:fillRef idx="3">
+            <a:schemeClr val="accent1"/>
+          </a:fillRef>
+          <a:effectRef idx="2">
+            <a:schemeClr val="accent1"/>
+          </a:effectRef>
+          <a:fontRef idx="minor">
+            <a:schemeClr val="lt1"/>
+          </a:fontRef>
+        </p:style>
+        <p:txBody>
+          <a:bodyPr rtlCol="0" anchor="ctr"/>
+          <a:lstStyle/>
+          <a:p>
+            <a:pPr algn="ctr"/>
+          </a:p>
+        </p:txBody>
+      </p:sp>
+      <p:sp>
+        <p:nvSpPr>
+          <p:cNvPr id="5" name="TextBox 4"/>
+          <p:cNvSpPr txBox="1"/>
+          <p:nvPr/>
+        </p:nvSpPr>
+        <p:spPr>
+          <a:xfrm>
+            <a:off x="914400" y="1828800"/>
+            <a:ext cx="5120640" cy="4023360"/>
+          </a:xfrm>
+          <a:prstGeom prst="rect">
+            <a:avLst/>
+          </a:prstGeom>
+          <a:noFill/>
+        </p:spPr>
+        <p:txBody>
+          <a:bodyPr wrap="square">
+            <a:spAutoFit/>
+          </a:bodyPr>
+          <a:lstStyle/>
+          <a:p>
+            <a:pPr>
+              <a:spcAft>
+                <a:spcPts val="1200"/>
+              </a:spcAft>
+              <a:defRPr sz="2000" b="1">
+                <a:solidFill>
+                  <a:srgbClr val="14B8A6"/>
+                </a:solidFill>
+                <a:latin typeface="Arial"/>
+              </a:defRPr>
+            </a:pPr>
+            <a:r>
+              <a:t>Scaling and Penalty Geometry</a:t>
+            </a:r>
+          </a:p>
+          <a:p>
+            <a:pPr>
+              <a:spcAft>
+                <a:spcPts val="800"/>
+              </a:spcAft>
+              <a:defRPr sz="1300">
+                <a:solidFill>
+                  <a:srgbClr val="A1A1AA"/>
+                </a:solidFill>
+                <a:latin typeface="Arial"/>
+              </a:defRPr>
+            </a:pPr>
+            <a:r>
+              <a:t>Normalization: Rescaling features to a shared coordinate bounds.</a:t>
+            </a:r>
+          </a:p>
+          <a:p>
+            <a:pPr>
+              <a:spcAft>
+                <a:spcPts val="800"/>
+              </a:spcAft>
+              <a:defRPr sz="1200">
+                <a:solidFill>
+                  <a:srgbClr val="A1A1AA"/>
+                </a:solidFill>
+                <a:latin typeface="Arial"/>
+              </a:defRPr>
+            </a:pPr>
+            <a:r>
+              <a:t>    - Min-Max Scaling: Maps features to a fixed [0, 1] range.</a:t>
+            </a:r>
+          </a:p>
+          <a:p>
+            <a:pPr>
+              <a:spcAft>
+                <a:spcPts val="800"/>
+              </a:spcAft>
+              <a:defRPr sz="1200">
+                <a:solidFill>
+                  <a:srgbClr val="A1A1AA"/>
+                </a:solidFill>
+                <a:latin typeface="Arial"/>
+              </a:defRPr>
+            </a:pPr>
+            <a:r>
+              <a:t>    - Standardization: Transforms features to have mean=0 and std=1.</a:t>
+            </a:r>
+          </a:p>
+          <a:p>
+            <a:pPr>
+              <a:spcAft>
+                <a:spcPts val="800"/>
+              </a:spcAft>
+              <a:defRPr sz="1300">
+                <a:solidFill>
+                  <a:srgbClr val="A1A1AA"/>
+                </a:solidFill>
+                <a:latin typeface="Arial"/>
+              </a:defRPr>
+            </a:pPr>
+            <a:r>
+              <a:t>Regularization: Constrains model parameter magnitudes to prevent overfitting.</a:t>
+            </a:r>
+          </a:p>
+          <a:p>
+            <a:pPr>
+              <a:spcAft>
+                <a:spcPts val="800"/>
+              </a:spcAft>
+              <a:defRPr sz="1200">
+                <a:solidFill>
+                  <a:srgbClr val="A1A1AA"/>
+                </a:solidFill>
+                <a:latin typeface="Arial"/>
+              </a:defRPr>
+            </a:pPr>
+            <a:r>
+              <a:t>    - Lasso (L1): Adds absolute weight penalty. Creates diamond-shaped boundaries that drive weights to exactly 0 (sparsity).</a:t>
+            </a:r>
+          </a:p>
+          <a:p>
+            <a:pPr>
+              <a:spcAft>
+                <a:spcPts val="800"/>
+              </a:spcAft>
+              <a:defRPr sz="1200">
+                <a:solidFill>
+                  <a:srgbClr val="A1A1AA"/>
+                </a:solidFill>
+                <a:latin typeface="Arial"/>
+              </a:defRPr>
+            </a:pPr>
+            <a:r>
+              <a:t>    - Ridge (L2): Adds squared weight penalty. Circular boundaries that shrink weights close to 0 but keep all features active.</a:t>
+            </a:r>
+          </a:p>
+        </p:txBody>
+      </p:sp>
+      <p:pic>
+        <p:nvPicPr>
+          <p:cNvPr id="6" name="Picture 5" descr="glossary_normalization_regularization.png"/>
+          <p:cNvPicPr>
+            <a:picLocks noChangeAspect="1"/>
+          </p:cNvPicPr>
+          <p:nvPr/>
+        </p:nvPicPr>
+        <p:blipFill>
+          <a:blip r:embed="rId2"/>
+          <a:stretch>
+            <a:fillRect/>
+          </a:stretch>
+        </p:blipFill>
+        <p:spPr>
+          <a:xfrm>
+            <a:off x="6812280" y="1645920"/>
+            <a:ext cx="4389120" cy="4389120"/>
+          </a:xfrm>
+          <a:prstGeom prst="rect">
+            <a:avLst/>
+          </a:prstGeom>
+        </p:spPr>
+      </p:pic>
+    </p:spTree>
+  </p:cSld>
+  <p:clrMapOvr>
+    <a:masterClrMapping/>
+  </p:clrMapOvr>
+</p:sld>
+</file>
+
+<file path=ppt/slides/slide19.xml><?xml version="1.0" encoding="utf-8"?>
+<p:sld xmlns:a="http://schemas.openxmlformats.org/drawingml/2006/main" xmlns:p="http://schemas.openxmlformats.org/presentationml/2006/main" xmlns:r="http://schemas.openxmlformats.org/officeDocument/2006/relationships">
+  <p:cSld>
+    <p:bg>
+      <p:bgPr>
+        <a:solidFill>
+          <a:srgbClr val="121214"/>
+        </a:solidFill>
+        <a:effectLst/>
+      </p:bgPr>
+    </p:bg>
+    <p:spTree>
+      <p:nvGrpSpPr>
+        <p:cNvPr id="1" name=""/>
+        <p:cNvGrpSpPr/>
+        <p:nvPr/>
+      </p:nvGrpSpPr>
+      <p:grpSpPr/>
+      <p:sp>
+        <p:nvSpPr>
+          <p:cNvPr id="2" name="TextBox 1"/>
+          <p:cNvSpPr txBox="1"/>
+          <p:nvPr/>
+        </p:nvSpPr>
+        <p:spPr>
+          <a:xfrm>
+            <a:off x="731520" y="365760"/>
+            <a:ext cx="10058400" cy="274320"/>
+          </a:xfrm>
+          <a:prstGeom prst="rect">
+            <a:avLst/>
+          </a:prstGeom>
+          <a:noFill/>
+        </p:spPr>
+        <p:txBody>
+          <a:bodyPr wrap="square" tIns="0" bIns="0" lIns="0" rIns="0">
+            <a:spAutoFit/>
+          </a:bodyPr>
+          <a:lstStyle/>
+          <a:p>
+            <a:pPr>
+              <a:defRPr sz="1000" b="1">
+                <a:solidFill>
+                  <a:srgbClr val="14B8A6"/>
+                </a:solidFill>
+                <a:latin typeface="Arial"/>
+              </a:defRPr>
+            </a:pPr>
+            <a:r>
+              <a:t>APPENDIX: GLOSSARY</a:t>
+            </a:r>
+          </a:p>
+        </p:txBody>
+      </p:sp>
+      <p:sp>
+        <p:nvSpPr>
+          <p:cNvPr id="3" name="TextBox 2"/>
+          <p:cNvSpPr txBox="1"/>
+          <p:nvPr/>
+        </p:nvSpPr>
+        <p:spPr>
+          <a:xfrm>
+            <a:off x="731520" y="548640"/>
+            <a:ext cx="10058400" cy="731520"/>
+          </a:xfrm>
+          <a:prstGeom prst="rect">
+            <a:avLst/>
+          </a:prstGeom>
+          <a:noFill/>
+        </p:spPr>
+        <p:txBody>
+          <a:bodyPr wrap="square" tIns="0" bIns="0" lIns="0" rIns="0">
+            <a:spAutoFit/>
+          </a:bodyPr>
+          <a:lstStyle/>
+          <a:p>
+            <a:pPr>
+              <a:defRPr sz="3000" b="1">
+                <a:solidFill>
+                  <a:srgbClr val="F8FAFC"/>
+                </a:solidFill>
+                <a:latin typeface="Arial"/>
+              </a:defRPr>
+            </a:pPr>
+            <a:r>
+              <a:t>Appendix: Optimization &amp; Bias</a:t>
+            </a:r>
+          </a:p>
+        </p:txBody>
+      </p:sp>
+      <p:sp>
+        <p:nvSpPr>
+          <p:cNvPr id="4" name="Rounded Rectangle 3"/>
+          <p:cNvSpPr/>
+          <p:nvPr/>
+        </p:nvSpPr>
+        <p:spPr>
+          <a:xfrm>
+            <a:off x="731520" y="1645920"/>
+            <a:ext cx="5486400" cy="4389120"/>
+          </a:xfrm>
+          <a:prstGeom prst="roundRect">
+            <a:avLst/>
+          </a:prstGeom>
+          <a:solidFill>
+            <a:srgbClr val="1E1E24"/>
+          </a:solidFill>
+          <a:ln w="19050">
+            <a:solidFill>
+              <a:srgbClr val="F59E0B"/>
+            </a:solidFill>
+          </a:ln>
+        </p:spPr>
+        <p:style>
+          <a:lnRef idx="1">
+            <a:schemeClr val="accent1"/>
+          </a:lnRef>
+          <a:fillRef idx="3">
+            <a:schemeClr val="accent1"/>
+          </a:fillRef>
+          <a:effectRef idx="2">
+            <a:schemeClr val="accent1"/>
+          </a:effectRef>
+          <a:fontRef idx="minor">
+            <a:schemeClr val="lt1"/>
+          </a:fontRef>
+        </p:style>
+        <p:txBody>
+          <a:bodyPr rtlCol="0" anchor="ctr"/>
+          <a:lstStyle/>
+          <a:p>
+            <a:pPr algn="ctr"/>
+          </a:p>
+        </p:txBody>
+      </p:sp>
+      <p:sp>
+        <p:nvSpPr>
+          <p:cNvPr id="5" name="TextBox 4"/>
+          <p:cNvSpPr txBox="1"/>
+          <p:nvPr/>
+        </p:nvSpPr>
+        <p:spPr>
+          <a:xfrm>
+            <a:off x="914400" y="1828800"/>
+            <a:ext cx="5120640" cy="4023360"/>
+          </a:xfrm>
+          <a:prstGeom prst="rect">
+            <a:avLst/>
+          </a:prstGeom>
+          <a:noFill/>
+        </p:spPr>
+        <p:txBody>
+          <a:bodyPr wrap="square">
+            <a:spAutoFit/>
+          </a:bodyPr>
+          <a:lstStyle/>
+          <a:p>
+            <a:pPr>
+              <a:spcAft>
+                <a:spcPts val="1200"/>
+              </a:spcAft>
+              <a:defRPr sz="2000" b="1">
+                <a:solidFill>
+                  <a:srgbClr val="14B8A6"/>
+                </a:solidFill>
+                <a:latin typeface="Arial"/>
+              </a:defRPr>
+            </a:pPr>
+            <a:r>
+              <a:t>Gradients and Algorithmic Assumptions</a:t>
+            </a:r>
+          </a:p>
+          <a:p>
+            <a:pPr>
+              <a:spcAft>
+                <a:spcPts val="800"/>
+              </a:spcAft>
+              <a:defRPr sz="1300">
+                <a:solidFill>
+                  <a:srgbClr val="A1A1AA"/>
+                </a:solidFill>
+                <a:latin typeface="Arial"/>
+              </a:defRPr>
+            </a:pPr>
+            <a:r>
+              <a:t>Gradient: Vector of partial derivatives pointing in the direction of steepest rate of function increase: [df/dw_1, ..., df/dw_D].</a:t>
+            </a:r>
+          </a:p>
+          <a:p>
+            <a:pPr>
+              <a:spcAft>
+                <a:spcPts val="800"/>
+              </a:spcAft>
+              <a:defRPr sz="1300">
+                <a:solidFill>
+                  <a:srgbClr val="A1A1AA"/>
+                </a:solidFill>
+                <a:latin typeface="Arial"/>
+              </a:defRPr>
+            </a:pPr>
+            <a:r>
+              <a:t>Gradient Descent: Updates weights along negative gradient: w = w - eta * grad.</a:t>
+            </a:r>
+          </a:p>
+          <a:p>
+            <a:pPr>
+              <a:spcAft>
+                <a:spcPts val="800"/>
+              </a:spcAft>
+              <a:defRPr sz="1300">
+                <a:solidFill>
+                  <a:srgbClr val="A1A1AA"/>
+                </a:solidFill>
+                <a:latin typeface="Arial"/>
+              </a:defRPr>
+            </a:pPr>
+            <a:r>
+              <a:t>Inductive Bias: Mathematical assumptions a model makes to generalize to unseen inputs (e.g., linear vs. locality bias).</a:t>
+            </a:r>
+          </a:p>
+          <a:p>
+            <a:pPr>
+              <a:spcAft>
+                <a:spcPts val="800"/>
+              </a:spcAft>
+              <a:defRPr sz="1300">
+                <a:solidFill>
+                  <a:srgbClr val="A1A1AA"/>
+                </a:solidFill>
+                <a:latin typeface="Arial"/>
+              </a:defRPr>
+            </a:pPr>
+            <a:r>
+              <a:t>Lazy Learning: Defers generalization until query time (e.g. KNN). Features zero training time but slow prediction.</a:t>
+            </a:r>
+          </a:p>
+          <a:p>
+            <a:pPr>
+              <a:spcAft>
+                <a:spcPts val="800"/>
+              </a:spcAft>
+              <a:defRPr sz="1300">
+                <a:solidFill>
+                  <a:srgbClr val="A1A1AA"/>
+                </a:solidFill>
+                <a:latin typeface="Arial"/>
+              </a:defRPr>
+            </a:pPr>
+            <a:r>
+              <a:t>Visual: Gradient 3D valley, linear/locality boundaries, KNN distance query.</a:t>
+            </a:r>
+          </a:p>
+        </p:txBody>
+      </p:sp>
+      <p:pic>
+        <p:nvPicPr>
+          <p:cNvPr id="6" name="Picture 5" descr="glossary_gradient_bias_lazy.png"/>
+          <p:cNvPicPr>
+            <a:picLocks noChangeAspect="1"/>
+          </p:cNvPicPr>
+          <p:nvPr/>
+        </p:nvPicPr>
+        <p:blipFill>
+          <a:blip r:embed="rId2"/>
+          <a:stretch>
+            <a:fillRect/>
+          </a:stretch>
+        </p:blipFill>
+        <p:spPr>
+          <a:xfrm>
+            <a:off x="6812280" y="1645920"/>
+            <a:ext cx="4389120" cy="4389120"/>
+          </a:xfrm>
+          <a:prstGeom prst="rect">
+            <a:avLst/>
+          </a:prstGeom>
+        </p:spPr>
+      </p:pic>
     </p:spTree>
   </p:cSld>
   <p:clrMapOvr>
@@ -3534,7 +6244,7 @@
               </a:defRPr>
             </a:pPr>
             <a:r>
-              <a:t>MACHINE LEARNING FUNDAMENTALS</a:t>
+              <a:t>MODULE 1: INTRODUCTION TO ML</a:t>
             </a:r>
           </a:p>
         </p:txBody>
@@ -3562,7 +6272,7 @@
           <a:lstStyle/>
           <a:p>
             <a:pPr>
-              <a:defRPr sz="3200" b="1">
+              <a:defRPr sz="3000" b="1">
                 <a:solidFill>
                   <a:srgbClr val="F8FAFC"/>
                 </a:solidFill>
@@ -3867,6 +6577,612 @@
             <a:br/>
             <a:r>
               <a:t>  Analyze millions of emails to extract probabilistic spam indicators automatically.</a:t>
+            </a:r>
+          </a:p>
+        </p:txBody>
+      </p:sp>
+    </p:spTree>
+  </p:cSld>
+  <p:clrMapOvr>
+    <a:masterClrMapping/>
+  </p:clrMapOvr>
+</p:sld>
+</file>
+
+<file path=ppt/slides/slide20.xml><?xml version="1.0" encoding="utf-8"?>
+<p:sld xmlns:a="http://schemas.openxmlformats.org/drawingml/2006/main" xmlns:p="http://schemas.openxmlformats.org/presentationml/2006/main" xmlns:r="http://schemas.openxmlformats.org/officeDocument/2006/relationships">
+  <p:cSld>
+    <p:bg>
+      <p:bgPr>
+        <a:solidFill>
+          <a:srgbClr val="121214"/>
+        </a:solidFill>
+        <a:effectLst/>
+      </p:bgPr>
+    </p:bg>
+    <p:spTree>
+      <p:nvGrpSpPr>
+        <p:cNvPr id="1" name=""/>
+        <p:cNvGrpSpPr/>
+        <p:nvPr/>
+      </p:nvGrpSpPr>
+      <p:grpSpPr/>
+      <p:sp>
+        <p:nvSpPr>
+          <p:cNvPr id="2" name="TextBox 1"/>
+          <p:cNvSpPr txBox="1"/>
+          <p:nvPr/>
+        </p:nvSpPr>
+        <p:spPr>
+          <a:xfrm>
+            <a:off x="731520" y="365760"/>
+            <a:ext cx="10058400" cy="274320"/>
+          </a:xfrm>
+          <a:prstGeom prst="rect">
+            <a:avLst/>
+          </a:prstGeom>
+          <a:noFill/>
+        </p:spPr>
+        <p:txBody>
+          <a:bodyPr wrap="square" tIns="0" bIns="0" lIns="0" rIns="0">
+            <a:spAutoFit/>
+          </a:bodyPr>
+          <a:lstStyle/>
+          <a:p>
+            <a:pPr>
+              <a:defRPr sz="1000" b="1">
+                <a:solidFill>
+                  <a:srgbClr val="14B8A6"/>
+                </a:solidFill>
+                <a:latin typeface="Arial"/>
+              </a:defRPr>
+            </a:pPr>
+            <a:r>
+              <a:t>APPENDIX: GLOSSARY</a:t>
+            </a:r>
+          </a:p>
+        </p:txBody>
+      </p:sp>
+      <p:sp>
+        <p:nvSpPr>
+          <p:cNvPr id="3" name="TextBox 2"/>
+          <p:cNvSpPr txBox="1"/>
+          <p:nvPr/>
+        </p:nvSpPr>
+        <p:spPr>
+          <a:xfrm>
+            <a:off x="731520" y="548640"/>
+            <a:ext cx="10058400" cy="731520"/>
+          </a:xfrm>
+          <a:prstGeom prst="rect">
+            <a:avLst/>
+          </a:prstGeom>
+          <a:noFill/>
+        </p:spPr>
+        <p:txBody>
+          <a:bodyPr wrap="square" tIns="0" bIns="0" lIns="0" rIns="0">
+            <a:spAutoFit/>
+          </a:bodyPr>
+          <a:lstStyle/>
+          <a:p>
+            <a:pPr>
+              <a:defRPr sz="3000" b="1">
+                <a:solidFill>
+                  <a:srgbClr val="F8FAFC"/>
+                </a:solidFill>
+                <a:latin typeface="Arial"/>
+              </a:defRPr>
+            </a:pPr>
+            <a:r>
+              <a:t>Appendix: LLM Core Terminology</a:t>
+            </a:r>
+          </a:p>
+        </p:txBody>
+      </p:sp>
+      <p:sp>
+        <p:nvSpPr>
+          <p:cNvPr id="4" name="Rounded Rectangle 3"/>
+          <p:cNvSpPr/>
+          <p:nvPr/>
+        </p:nvSpPr>
+        <p:spPr>
+          <a:xfrm>
+            <a:off x="731520" y="1645920"/>
+            <a:ext cx="5486400" cy="4389120"/>
+          </a:xfrm>
+          <a:prstGeom prst="roundRect">
+            <a:avLst/>
+          </a:prstGeom>
+          <a:solidFill>
+            <a:srgbClr val="1E1E24"/>
+          </a:solidFill>
+          <a:ln w="19050">
+            <a:solidFill>
+              <a:srgbClr val="A855F7"/>
+            </a:solidFill>
+          </a:ln>
+        </p:spPr>
+        <p:style>
+          <a:lnRef idx="1">
+            <a:schemeClr val="accent1"/>
+          </a:lnRef>
+          <a:fillRef idx="3">
+            <a:schemeClr val="accent1"/>
+          </a:fillRef>
+          <a:effectRef idx="2">
+            <a:schemeClr val="accent1"/>
+          </a:effectRef>
+          <a:fontRef idx="minor">
+            <a:schemeClr val="lt1"/>
+          </a:fontRef>
+        </p:style>
+        <p:txBody>
+          <a:bodyPr rtlCol="0" anchor="ctr"/>
+          <a:lstStyle/>
+          <a:p>
+            <a:pPr algn="ctr"/>
+          </a:p>
+        </p:txBody>
+      </p:sp>
+      <p:sp>
+        <p:nvSpPr>
+          <p:cNvPr id="5" name="TextBox 4"/>
+          <p:cNvSpPr txBox="1"/>
+          <p:nvPr/>
+        </p:nvSpPr>
+        <p:spPr>
+          <a:xfrm>
+            <a:off x="914400" y="1828800"/>
+            <a:ext cx="5120640" cy="4023360"/>
+          </a:xfrm>
+          <a:prstGeom prst="rect">
+            <a:avLst/>
+          </a:prstGeom>
+          <a:noFill/>
+        </p:spPr>
+        <p:txBody>
+          <a:bodyPr wrap="square">
+            <a:spAutoFit/>
+          </a:bodyPr>
+          <a:lstStyle/>
+          <a:p>
+            <a:pPr>
+              <a:spcAft>
+                <a:spcPts val="1200"/>
+              </a:spcAft>
+              <a:defRPr sz="2000" b="1">
+                <a:solidFill>
+                  <a:srgbClr val="14B8A6"/>
+                </a:solidFill>
+                <a:latin typeface="Arial"/>
+              </a:defRPr>
+            </a:pPr>
+            <a:r>
+              <a:t>Transformer Building Blocks</a:t>
+            </a:r>
+          </a:p>
+          <a:p>
+            <a:pPr>
+              <a:spcAft>
+                <a:spcPts val="800"/>
+              </a:spcAft>
+              <a:defRPr sz="1300">
+                <a:solidFill>
+                  <a:srgbClr val="A1A1AA"/>
+                </a:solidFill>
+                <a:latin typeface="Arial"/>
+              </a:defRPr>
+            </a:pPr>
+            <a:r>
+              <a:t>Token: The basic subword unit mapping to vocabulary IDs.</a:t>
+            </a:r>
+          </a:p>
+          <a:p>
+            <a:pPr>
+              <a:spcAft>
+                <a:spcPts val="800"/>
+              </a:spcAft>
+              <a:defRPr sz="1300">
+                <a:solidFill>
+                  <a:srgbClr val="A1A1AA"/>
+                </a:solidFill>
+                <a:latin typeface="Arial"/>
+              </a:defRPr>
+            </a:pPr>
+            <a:r>
+              <a:t>Self-Attention: Maps query (Q) alignments to keys (K) to weight values (V).</a:t>
+            </a:r>
+          </a:p>
+          <a:p>
+            <a:pPr>
+              <a:spcAft>
+                <a:spcPts val="800"/>
+              </a:spcAft>
+              <a:defRPr sz="1300">
+                <a:solidFill>
+                  <a:srgbClr val="A1A1AA"/>
+                </a:solidFill>
+                <a:latin typeface="Arial"/>
+              </a:defRPr>
+            </a:pPr>
+            <a:r>
+              <a:t>Causal Mask: Restricts attention to past positions.</a:t>
+            </a:r>
+          </a:p>
+          <a:p>
+            <a:pPr>
+              <a:spcAft>
+                <a:spcPts val="800"/>
+              </a:spcAft>
+              <a:defRPr sz="1300">
+                <a:solidFill>
+                  <a:srgbClr val="A1A1AA"/>
+                </a:solidFill>
+                <a:latin typeface="Arial"/>
+              </a:defRPr>
+            </a:pPr>
+            <a:r>
+              <a:t>Autoregressive Decoding: Appends output tokens back to input sequence.</a:t>
+            </a:r>
+          </a:p>
+          <a:p>
+            <a:pPr>
+              <a:spcAft>
+                <a:spcPts val="800"/>
+              </a:spcAft>
+              <a:defRPr sz="1300">
+                <a:solidFill>
+                  <a:srgbClr val="A1A1AA"/>
+                </a:solidFill>
+                <a:latin typeface="Arial"/>
+              </a:defRPr>
+            </a:pPr>
+            <a:r>
+              <a:t>Temperature: Scaling factor applied to logits before softmax.</a:t>
+            </a:r>
+          </a:p>
+          <a:p>
+            <a:pPr>
+              <a:spcAft>
+                <a:spcPts val="800"/>
+              </a:spcAft>
+              <a:defRPr sz="1200">
+                <a:solidFill>
+                  <a:srgbClr val="A1A1AA"/>
+                </a:solidFill>
+                <a:latin typeface="Arial"/>
+              </a:defRPr>
+            </a:pPr>
+            <a:r>
+              <a:t>    - Low Temp (T -&gt; 0): Peakier probabilities, deterministic generation.</a:t>
+            </a:r>
+          </a:p>
+          <a:p>
+            <a:pPr>
+              <a:spcAft>
+                <a:spcPts val="800"/>
+              </a:spcAft>
+              <a:defRPr sz="1200">
+                <a:solidFill>
+                  <a:srgbClr val="A1A1AA"/>
+                </a:solidFill>
+                <a:latin typeface="Arial"/>
+              </a:defRPr>
+            </a:pPr>
+            <a:r>
+              <a:t>    - High Temp (T -&gt; infinity): Uniform probabilities, highly random/creative.</a:t>
+            </a:r>
+          </a:p>
+          <a:p>
+            <a:pPr>
+              <a:spcAft>
+                <a:spcPts val="800"/>
+              </a:spcAft>
+              <a:defRPr sz="1300">
+                <a:solidFill>
+                  <a:srgbClr val="A1A1AA"/>
+                </a:solidFill>
+                <a:latin typeface="Arial"/>
+              </a:defRPr>
+            </a:pPr>
+            <a:r>
+              <a:t>Visual: Token IDs, Self-Attention nodes, Mask heatmap, and Temperature curves.</a:t>
+            </a:r>
+          </a:p>
+        </p:txBody>
+      </p:sp>
+      <p:pic>
+        <p:nvPicPr>
+          <p:cNvPr id="6" name="Picture 5" descr="glossary_llm_concepts.png"/>
+          <p:cNvPicPr>
+            <a:picLocks noChangeAspect="1"/>
+          </p:cNvPicPr>
+          <p:nvPr/>
+        </p:nvPicPr>
+        <p:blipFill>
+          <a:blip r:embed="rId2"/>
+          <a:stretch>
+            <a:fillRect/>
+          </a:stretch>
+        </p:blipFill>
+        <p:spPr>
+          <a:xfrm>
+            <a:off x="6812280" y="1645920"/>
+            <a:ext cx="4389120" cy="4389120"/>
+          </a:xfrm>
+          <a:prstGeom prst="rect">
+            <a:avLst/>
+          </a:prstGeom>
+        </p:spPr>
+      </p:pic>
+    </p:spTree>
+  </p:cSld>
+  <p:clrMapOvr>
+    <a:masterClrMapping/>
+  </p:clrMapOvr>
+</p:sld>
+</file>
+
+<file path=ppt/slides/slide21.xml><?xml version="1.0" encoding="utf-8"?>
+<p:sld xmlns:a="http://schemas.openxmlformats.org/drawingml/2006/main" xmlns:p="http://schemas.openxmlformats.org/presentationml/2006/main" xmlns:r="http://schemas.openxmlformats.org/officeDocument/2006/relationships">
+  <p:cSld>
+    <p:bg>
+      <p:bgPr>
+        <a:solidFill>
+          <a:srgbClr val="121214"/>
+        </a:solidFill>
+        <a:effectLst/>
+      </p:bgPr>
+    </p:bg>
+    <p:spTree>
+      <p:nvGrpSpPr>
+        <p:cNvPr id="1" name=""/>
+        <p:cNvGrpSpPr/>
+        <p:nvPr/>
+      </p:nvGrpSpPr>
+      <p:grpSpPr/>
+      <p:sp>
+        <p:nvSpPr>
+          <p:cNvPr id="2" name="TextBox 1"/>
+          <p:cNvSpPr txBox="1"/>
+          <p:nvPr/>
+        </p:nvSpPr>
+        <p:spPr>
+          <a:xfrm>
+            <a:off x="731520" y="365760"/>
+            <a:ext cx="10058400" cy="274320"/>
+          </a:xfrm>
+          <a:prstGeom prst="rect">
+            <a:avLst/>
+          </a:prstGeom>
+          <a:noFill/>
+        </p:spPr>
+        <p:txBody>
+          <a:bodyPr wrap="square" tIns="0" bIns="0" lIns="0" rIns="0">
+            <a:spAutoFit/>
+          </a:bodyPr>
+          <a:lstStyle/>
+          <a:p>
+            <a:pPr>
+              <a:defRPr sz="1000" b="1">
+                <a:solidFill>
+                  <a:srgbClr val="14B8A6"/>
+                </a:solidFill>
+                <a:latin typeface="Arial"/>
+              </a:defRPr>
+            </a:pPr>
+            <a:r>
+              <a:t>COURSE CONCLUSION</a:t>
+            </a:r>
+          </a:p>
+        </p:txBody>
+      </p:sp>
+      <p:sp>
+        <p:nvSpPr>
+          <p:cNvPr id="3" name="TextBox 2"/>
+          <p:cNvSpPr txBox="1"/>
+          <p:nvPr/>
+        </p:nvSpPr>
+        <p:spPr>
+          <a:xfrm>
+            <a:off x="731520" y="548640"/>
+            <a:ext cx="10058400" cy="731520"/>
+          </a:xfrm>
+          <a:prstGeom prst="rect">
+            <a:avLst/>
+          </a:prstGeom>
+          <a:noFill/>
+        </p:spPr>
+        <p:txBody>
+          <a:bodyPr wrap="square" tIns="0" bIns="0" lIns="0" rIns="0">
+            <a:spAutoFit/>
+          </a:bodyPr>
+          <a:lstStyle/>
+          <a:p>
+            <a:pPr>
+              <a:defRPr sz="3000" b="1">
+                <a:solidFill>
+                  <a:srgbClr val="F8FAFC"/>
+                </a:solidFill>
+                <a:latin typeface="Arial"/>
+              </a:defRPr>
+            </a:pPr>
+            <a:r>
+              <a:t>Teaching Strategy &amp; Lecture Structure</a:t>
+            </a:r>
+          </a:p>
+        </p:txBody>
+      </p:sp>
+      <p:sp>
+        <p:nvSpPr>
+          <p:cNvPr id="4" name="Rounded Rectangle 3"/>
+          <p:cNvSpPr/>
+          <p:nvPr/>
+        </p:nvSpPr>
+        <p:spPr>
+          <a:xfrm>
+            <a:off x="731520" y="1645920"/>
+            <a:ext cx="10698480" cy="4389120"/>
+          </a:xfrm>
+          <a:prstGeom prst="roundRect">
+            <a:avLst/>
+          </a:prstGeom>
+          <a:solidFill>
+            <a:srgbClr val="1E1E24"/>
+          </a:solidFill>
+          <a:ln w="19050">
+            <a:solidFill>
+              <a:srgbClr val="14B8A6"/>
+            </a:solidFill>
+          </a:ln>
+        </p:spPr>
+        <p:style>
+          <a:lnRef idx="1">
+            <a:schemeClr val="accent1"/>
+          </a:lnRef>
+          <a:fillRef idx="3">
+            <a:schemeClr val="accent1"/>
+          </a:fillRef>
+          <a:effectRef idx="2">
+            <a:schemeClr val="accent1"/>
+          </a:effectRef>
+          <a:fontRef idx="minor">
+            <a:schemeClr val="lt1"/>
+          </a:fontRef>
+        </p:style>
+        <p:txBody>
+          <a:bodyPr rtlCol="0" anchor="ctr"/>
+          <a:lstStyle/>
+          <a:p>
+            <a:pPr algn="ctr"/>
+          </a:p>
+        </p:txBody>
+      </p:sp>
+      <p:sp>
+        <p:nvSpPr>
+          <p:cNvPr id="5" name="TextBox 4"/>
+          <p:cNvSpPr txBox="1"/>
+          <p:nvPr/>
+        </p:nvSpPr>
+        <p:spPr>
+          <a:xfrm>
+            <a:off x="1097280" y="1828800"/>
+            <a:ext cx="9966960" cy="4023360"/>
+          </a:xfrm>
+          <a:prstGeom prst="rect">
+            <a:avLst/>
+          </a:prstGeom>
+          <a:noFill/>
+        </p:spPr>
+        <p:txBody>
+          <a:bodyPr wrap="square">
+            <a:spAutoFit/>
+          </a:bodyPr>
+          <a:lstStyle/>
+          <a:p>
+            <a:pPr>
+              <a:spcAft>
+                <a:spcPts val="1400"/>
+              </a:spcAft>
+              <a:defRPr sz="2400" b="1">
+                <a:solidFill>
+                  <a:srgbClr val="14B8A6"/>
+                </a:solidFill>
+                <a:latin typeface="Arial"/>
+              </a:defRPr>
+            </a:pPr>
+            <a:r>
+              <a:t>Recommended Lecture Structure</a:t>
+            </a:r>
+          </a:p>
+          <a:p>
+            <a:pPr>
+              <a:spcAft>
+                <a:spcPts val="1200"/>
+              </a:spcAft>
+              <a:defRPr sz="1600">
+                <a:solidFill>
+                  <a:srgbClr val="A1A1AA"/>
+                </a:solidFill>
+              </a:defRPr>
+            </a:pPr>
+            <a:r>
+              <a:t>1. Start with Paradigms: Make students classify everyday examples manually.</a:t>
+            </a:r>
+          </a:p>
+          <a:p>
+            <a:pPr>
+              <a:spcAft>
+                <a:spcPts val="1200"/>
+              </a:spcAft>
+              <a:defRPr sz="1600">
+                <a:solidFill>
+                  <a:srgbClr val="A1A1AA"/>
+                </a:solidFill>
+              </a:defRPr>
+            </a:pPr>
+            <a:r>
+              <a:t>2. Regression vs. Classification: Differentiate numeric forecasting vs. discrete categorization.</a:t>
+            </a:r>
+          </a:p>
+          <a:p>
+            <a:pPr>
+              <a:spcAft>
+                <a:spcPts val="1200"/>
+              </a:spcAft>
+              <a:defRPr sz="1600">
+                <a:solidFill>
+                  <a:srgbClr val="A1A1AA"/>
+                </a:solidFill>
+              </a:defRPr>
+            </a:pPr>
+            <a:r>
+              <a:t>3. Mathematics to Code: Show the formulas (Lasso, Logistic) side-by-side with scikit-learn models.</a:t>
+            </a:r>
+          </a:p>
+          <a:p>
+            <a:pPr>
+              <a:spcAft>
+                <a:spcPts val="1200"/>
+              </a:spcAft>
+              <a:defRPr sz="1600">
+                <a:solidFill>
+                  <a:srgbClr val="A1A1AA"/>
+                </a:solidFill>
+              </a:defRPr>
+            </a:pPr>
+            <a:r>
+              <a:t>4. Emphasize Evaluation: A model scoring 99% accuracy on training data is almost always overfit.</a:t>
+            </a:r>
+          </a:p>
+          <a:p>
+            <a:pPr>
+              <a:spcAft>
+                <a:spcPts val="1200"/>
+              </a:spcAft>
+              <a:defRPr sz="1600">
+                <a:solidFill>
+                  <a:srgbClr val="A1A1AA"/>
+                </a:solidFill>
+              </a:defRPr>
+            </a:pPr>
+            <a:r>
+              <a:t>5. Hands-on labs: Have students tune K-Means centroids or Random Forest depths on standard datasets (Iris/Titanic).</a:t>
+            </a:r>
+          </a:p>
+          <a:p>
+            <a:pPr>
+              <a:spcAft>
+                <a:spcPts val="1200"/>
+              </a:spcAft>
+              <a:defRPr sz="1600">
+                <a:solidFill>
+                  <a:srgbClr val="A1A1AA"/>
+                </a:solidFill>
+              </a:defRPr>
+            </a:pPr>
+            <a:r>
+              <a:t>6. Introduce Generative AI: Transition from embeddings (Word2Vec) to sequential comprehension (Transformers).</a:t>
             </a:r>
           </a:p>
         </p:txBody>
@@ -3928,7 +7244,7 @@
               </a:defRPr>
             </a:pPr>
             <a:r>
-              <a:t>MACHINE LEARNING FUNDAMENTALS</a:t>
+              <a:t>MODULE 2: LEARNING PARADIGMS</a:t>
             </a:r>
           </a:p>
         </p:txBody>
@@ -3956,7 +7272,7 @@
           <a:lstStyle/>
           <a:p>
             <a:pPr>
-              <a:defRPr sz="3200" b="1">
+              <a:defRPr sz="3000" b="1">
                 <a:solidFill>
                   <a:srgbClr val="F8FAFC"/>
                 </a:solidFill>
@@ -4518,7 +7834,7 @@
               </a:defRPr>
             </a:pPr>
             <a:r>
-              <a:t>MACHINE LEARNING FUNDAMENTALS</a:t>
+              <a:t>MODULE 3: SUPERVISED REGRESSION</a:t>
             </a:r>
           </a:p>
         </p:txBody>
@@ -4546,7 +7862,7 @@
           <a:lstStyle/>
           <a:p>
             <a:pPr>
-              <a:defRPr sz="3200" b="1">
+              <a:defRPr sz="3000" b="1">
                 <a:solidFill>
                   <a:srgbClr val="F8FAFC"/>
                 </a:solidFill>
@@ -4568,7 +7884,7 @@
         <p:spPr>
           <a:xfrm>
             <a:off x="731520" y="1645920"/>
-            <a:ext cx="5029200" cy="4389120"/>
+            <a:ext cx="5486400" cy="4389120"/>
           </a:xfrm>
           <a:prstGeom prst="roundRect">
             <a:avLst/>
@@ -4578,7 +7894,7 @@
           </a:solidFill>
           <a:ln w="19050">
             <a:solidFill>
-              <a:srgbClr val="6366F1"/>
+              <a:srgbClr val="14B8A6"/>
             </a:solidFill>
           </a:ln>
         </p:spPr>
@@ -4612,8 +7928,8 @@
         </p:nvSpPr>
         <p:spPr>
           <a:xfrm>
-            <a:off x="1005840" y="1828800"/>
-            <a:ext cx="4480560" cy="4023360"/>
+            <a:off x="914400" y="1828800"/>
+            <a:ext cx="5120640" cy="4023360"/>
           </a:xfrm>
           <a:prstGeom prst="rect">
             <a:avLst/>
@@ -4630,7 +7946,7 @@
               <a:spcAft>
                 <a:spcPts val="1200"/>
               </a:spcAft>
-              <a:defRPr sz="2200" b="1">
+              <a:defRPr sz="2000" b="1">
                 <a:solidFill>
                   <a:srgbClr val="14B8A6"/>
                 </a:solidFill>
@@ -4638,230 +7954,115 @@
               </a:defRPr>
             </a:pPr>
             <a:r>
-              <a:t>Ordinary Least Squares (OLS)</a:t>
-            </a:r>
-          </a:p>
-          <a:p>
-            <a:pPr>
-              <a:spcAft>
-                <a:spcPts val="1000"/>
-              </a:spcAft>
-              <a:defRPr sz="1500">
-                <a:solidFill>
-                  <a:srgbClr val="A1A1AA"/>
-                </a:solidFill>
-              </a:defRPr>
-            </a:pPr>
-            <a:r>
-              <a:t>• Equation: y_hat = theta_0 + theta_1 * x_1 + ...</a:t>
-            </a:r>
-          </a:p>
-          <a:p>
-            <a:pPr>
-              <a:spcAft>
-                <a:spcPts val="1000"/>
-              </a:spcAft>
-              <a:defRPr sz="1500">
-                <a:solidFill>
-                  <a:srgbClr val="A1A1AA"/>
-                </a:solidFill>
-              </a:defRPr>
-            </a:pPr>
-            <a:r>
-              <a:t>• Minimize Mean Squared Error (MSE) cost function.</a:t>
-            </a:r>
-          </a:p>
-          <a:p>
-            <a:pPr>
-              <a:spcAft>
-                <a:spcPts val="1000"/>
-              </a:spcAft>
-              <a:defRPr sz="1500">
-                <a:solidFill>
-                  <a:srgbClr val="A1A1AA"/>
-                </a:solidFill>
-              </a:defRPr>
-            </a:pPr>
-            <a:r>
-              <a:t>• Uses Gradient Descent for iterative parameter optimization.</a:t>
-            </a:r>
-          </a:p>
-          <a:p>
-            <a:pPr>
-              <a:spcAft>
-                <a:spcPts val="1000"/>
-              </a:spcAft>
-              <a:defRPr sz="1500">
-                <a:solidFill>
-                  <a:srgbClr val="A1A1AA"/>
-                </a:solidFill>
-              </a:defRPr>
-            </a:pPr>
-            <a:r>
-              <a:t>• Prone to overfitting if features contain significant multicollinearity or noise.</a:t>
-            </a:r>
-          </a:p>
-        </p:txBody>
-      </p:sp>
-      <p:sp>
-        <p:nvSpPr>
-          <p:cNvPr id="6" name="Rounded Rectangle 5"/>
-          <p:cNvSpPr/>
-          <p:nvPr/>
-        </p:nvSpPr>
-        <p:spPr>
-          <a:xfrm>
-            <a:off x="6400800" y="1645920"/>
-            <a:ext cx="5029200" cy="4389120"/>
-          </a:xfrm>
-          <a:prstGeom prst="roundRect">
-            <a:avLst/>
-          </a:prstGeom>
-          <a:solidFill>
-            <a:srgbClr val="1E1E24"/>
-          </a:solidFill>
-          <a:ln w="19050">
-            <a:solidFill>
-              <a:srgbClr val="6366F1"/>
-            </a:solidFill>
-          </a:ln>
-        </p:spPr>
-        <p:style>
-          <a:lnRef idx="1">
-            <a:schemeClr val="accent1"/>
-          </a:lnRef>
-          <a:fillRef idx="3">
-            <a:schemeClr val="accent1"/>
-          </a:fillRef>
-          <a:effectRef idx="2">
-            <a:schemeClr val="accent1"/>
-          </a:effectRef>
-          <a:fontRef idx="minor">
-            <a:schemeClr val="lt1"/>
-          </a:fontRef>
-        </p:style>
-        <p:txBody>
-          <a:bodyPr rtlCol="0" anchor="ctr"/>
-          <a:lstStyle/>
-          <a:p>
-            <a:pPr algn="ctr"/>
-          </a:p>
-        </p:txBody>
-      </p:sp>
-      <p:sp>
-        <p:nvSpPr>
-          <p:cNvPr id="7" name="TextBox 6"/>
-          <p:cNvSpPr txBox="1"/>
-          <p:nvPr/>
-        </p:nvSpPr>
-        <p:spPr>
-          <a:xfrm>
-            <a:off x="6675120" y="1828800"/>
-            <a:ext cx="4480560" cy="4023360"/>
+              <a:t>Continuous Model Formulation</a:t>
+            </a:r>
+          </a:p>
+          <a:p>
+            <a:pPr>
+              <a:spcAft>
+                <a:spcPts val="800"/>
+              </a:spcAft>
+              <a:defRPr sz="1300">
+                <a:solidFill>
+                  <a:srgbClr val="A1A1AA"/>
+                </a:solidFill>
+                <a:latin typeface="Arial"/>
+              </a:defRPr>
+            </a:pPr>
+            <a:r>
+              <a:t>Ordinary Least Squares (OLS): Fits a linear equation: y_hat = theta_0 + theta_1 * x_1 + ...</a:t>
+            </a:r>
+          </a:p>
+          <a:p>
+            <a:pPr>
+              <a:spcAft>
+                <a:spcPts val="800"/>
+              </a:spcAft>
+              <a:defRPr sz="1300">
+                <a:solidFill>
+                  <a:srgbClr val="A1A1AA"/>
+                </a:solidFill>
+                <a:latin typeface="Arial"/>
+              </a:defRPr>
+            </a:pPr>
+            <a:r>
+              <a:t>Cost Function: Minimizes Mean Squared Error (MSE) to align the regression line.</a:t>
+            </a:r>
+          </a:p>
+          <a:p>
+            <a:pPr>
+              <a:spcAft>
+                <a:spcPts val="800"/>
+              </a:spcAft>
+              <a:defRPr sz="1300">
+                <a:solidFill>
+                  <a:srgbClr val="A1A1AA"/>
+                </a:solidFill>
+                <a:latin typeface="Arial"/>
+              </a:defRPr>
+            </a:pPr>
+            <a:r>
+              <a:t>L2 Regularization (Ridge): Adds penalty lambda * sum(theta^2). Shrinks weights close to zero, decreasing variance.</a:t>
+            </a:r>
+          </a:p>
+          <a:p>
+            <a:pPr>
+              <a:spcAft>
+                <a:spcPts val="800"/>
+              </a:spcAft>
+              <a:defRPr sz="1300">
+                <a:solidFill>
+                  <a:srgbClr val="A1A1AA"/>
+                </a:solidFill>
+                <a:latin typeface="Arial"/>
+              </a:defRPr>
+            </a:pPr>
+            <a:r>
+              <a:t>L1 Regularization (Lasso): Adds penalty lambda * sum(|theta|). Drives coefficients to exactly zero (Soft-Thresholding), doing automatic feature selection.</a:t>
+            </a:r>
+          </a:p>
+          <a:p>
+            <a:pPr>
+              <a:spcAft>
+                <a:spcPts val="800"/>
+              </a:spcAft>
+              <a:defRPr sz="1300">
+                <a:solidFill>
+                  <a:srgbClr val="A1A1AA"/>
+                </a:solidFill>
+                <a:latin typeface="Arial"/>
+              </a:defRPr>
+            </a:pPr>
+            <a:r>
+              <a:t>Visual: Framework OLS vs. Ridge vs. Lasso on housing per-sq-ft.</a:t>
+            </a:r>
+          </a:p>
+        </p:txBody>
+      </p:sp>
+      <p:pic>
+        <p:nvPicPr>
+          <p:cNvPr id="6" name="Picture 5" descr="examples_1_regression.png"/>
+          <p:cNvPicPr>
+            <a:picLocks noChangeAspect="1"/>
+          </p:cNvPicPr>
+          <p:nvPr/>
+        </p:nvPicPr>
+        <p:blipFill>
+          <a:blip r:embed="rId2"/>
+          <a:stretch>
+            <a:fillRect/>
+          </a:stretch>
+        </p:blipFill>
+        <p:spPr>
+          <a:xfrm>
+            <a:off x="6583680" y="2225040"/>
+            <a:ext cx="4846320" cy="3230880"/>
           </a:xfrm>
           <a:prstGeom prst="rect">
             <a:avLst/>
           </a:prstGeom>
-          <a:noFill/>
-        </p:spPr>
-        <p:txBody>
-          <a:bodyPr wrap="square">
-            <a:spAutoFit/>
-          </a:bodyPr>
-          <a:lstStyle/>
-          <a:p>
-            <a:pPr>
-              <a:spcAft>
-                <a:spcPts val="1200"/>
-              </a:spcAft>
-              <a:defRPr sz="2200" b="1">
-                <a:solidFill>
-                  <a:srgbClr val="6366F1"/>
-                </a:solidFill>
-                <a:latin typeface="Arial"/>
-              </a:defRPr>
-            </a:pPr>
-            <a:r>
-              <a:t>Regularized Regression</a:t>
-            </a:r>
-          </a:p>
-          <a:p>
-            <a:pPr>
-              <a:spcAft>
-                <a:spcPts val="1000"/>
-              </a:spcAft>
-              <a:defRPr sz="1500">
-                <a:solidFill>
-                  <a:srgbClr val="A1A1AA"/>
-                </a:solidFill>
-              </a:defRPr>
-            </a:pPr>
-            <a:r>
-              <a:t>• Ridge (L2 Penalty): Adds lambda * sum(theta_j^2) to loss.</a:t>
-            </a:r>
-          </a:p>
-          <a:p>
-            <a:pPr>
-              <a:spcAft>
-                <a:spcPts val="1000"/>
-              </a:spcAft>
-              <a:defRPr sz="1500">
-                <a:solidFill>
-                  <a:srgbClr val="A1A1AA"/>
-                </a:solidFill>
-              </a:defRPr>
-            </a:pPr>
-            <a:r>
-              <a:t>  - Constrains coefficients, decreasing variance.</a:t>
-            </a:r>
-          </a:p>
-          <a:p>
-            <a:pPr>
-              <a:spcAft>
-                <a:spcPts val="1000"/>
-              </a:spcAft>
-              <a:defRPr sz="1500">
-                <a:solidFill>
-                  <a:srgbClr val="A1A1AA"/>
-                </a:solidFill>
-              </a:defRPr>
-            </a:pPr>
-            <a:r>
-              <a:t>• Lasso (L1 Penalty): Adds lambda * sum(|theta_j|) to loss.</a:t>
-            </a:r>
-          </a:p>
-          <a:p>
-            <a:pPr>
-              <a:spcAft>
-                <a:spcPts val="1000"/>
-              </a:spcAft>
-              <a:defRPr sz="1500">
-                <a:solidFill>
-                  <a:srgbClr val="A1A1AA"/>
-                </a:solidFill>
-              </a:defRPr>
-            </a:pPr>
-            <a:r>
-              <a:t>  - Forces negligible features to zero, performing automatic feature selection.</a:t>
-            </a:r>
-          </a:p>
-          <a:p>
-            <a:pPr>
-              <a:spcAft>
-                <a:spcPts val="1000"/>
-              </a:spcAft>
-              <a:defRPr sz="1500">
-                <a:solidFill>
-                  <a:srgbClr val="A1A1AA"/>
-                </a:solidFill>
-              </a:defRPr>
-            </a:pPr>
-            <a:r>
-              <a:t>• Crucial for high-dimensional data with redundant inputs.</a:t>
-            </a:r>
-          </a:p>
-        </p:txBody>
-      </p:sp>
+        </p:spPr>
+      </p:pic>
     </p:spTree>
   </p:cSld>
   <p:clrMapOvr>
@@ -4919,7 +8120,7 @@
               </a:defRPr>
             </a:pPr>
             <a:r>
-              <a:t>MACHINE LEARNING FUNDAMENTALS</a:t>
+              <a:t>MODULE 4: SUPERVISED CLASSIFICATION</a:t>
             </a:r>
           </a:p>
         </p:txBody>
@@ -4947,7 +8148,7 @@
           <a:lstStyle/>
           <a:p>
             <a:pPr>
-              <a:defRPr sz="3200" b="1">
+              <a:defRPr sz="3000" b="1">
                 <a:solidFill>
                   <a:srgbClr val="F8FAFC"/>
                 </a:solidFill>
@@ -4955,7 +8156,7 @@
               </a:defRPr>
             </a:pPr>
             <a:r>
-              <a:t>Classification: Binary &amp; Multi-Class Models</a:t>
+              <a:t>Classification: Categorizing Observations</a:t>
             </a:r>
           </a:p>
         </p:txBody>
@@ -4969,7 +8170,7 @@
         <p:spPr>
           <a:xfrm>
             <a:off x="731520" y="1645920"/>
-            <a:ext cx="3337560" cy="4389120"/>
+            <a:ext cx="5486400" cy="4389120"/>
           </a:xfrm>
           <a:prstGeom prst="roundRect">
             <a:avLst/>
@@ -4979,7 +8180,7 @@
           </a:solidFill>
           <a:ln w="19050">
             <a:solidFill>
-              <a:srgbClr val="14B8A6"/>
+              <a:srgbClr val="6366F1"/>
             </a:solidFill>
           </a:ln>
         </p:spPr>
@@ -5013,8 +8214,8 @@
         </p:nvSpPr>
         <p:spPr>
           <a:xfrm>
-            <a:off x="914400" y="1920240"/>
-            <a:ext cx="2971800" cy="3840480"/>
+            <a:off x="914400" y="1828800"/>
+            <a:ext cx="5120640" cy="4023360"/>
           </a:xfrm>
           <a:prstGeom prst="rect">
             <a:avLst/>
@@ -5029,9 +8230,9 @@
           <a:p>
             <a:pPr>
               <a:spcAft>
-                <a:spcPts val="1400"/>
-              </a:spcAft>
-              <a:defRPr sz="2200" b="1">
+                <a:spcPts val="1200"/>
+              </a:spcAft>
+              <a:defRPr sz="2000" b="1">
                 <a:solidFill>
                   <a:srgbClr val="14B8A6"/>
                 </a:solidFill>
@@ -5039,224 +8240,115 @@
               </a:defRPr>
             </a:pPr>
             <a:r>
-              <a:t>Logistic Regression</a:t>
-            </a:r>
-          </a:p>
-          <a:p>
-            <a:pPr>
-              <a:spcAft>
-                <a:spcPts val="1000"/>
-              </a:spcAft>
-              <a:defRPr sz="1500">
-                <a:solidFill>
-                  <a:srgbClr val="A1A1AA"/>
-                </a:solidFill>
-              </a:defRPr>
-            </a:pPr>
-            <a:r>
-              <a:t>Maps outputs into probabilities using the Sigmoid curve: 1 / (1 + e^-z). Optimizes log loss to establish boundaries.</a:t>
-            </a:r>
-          </a:p>
-        </p:txBody>
-      </p:sp>
-      <p:sp>
-        <p:nvSpPr>
-          <p:cNvPr id="6" name="Rounded Rectangle 5"/>
-          <p:cNvSpPr/>
-          <p:nvPr/>
-        </p:nvSpPr>
-        <p:spPr>
-          <a:xfrm>
-            <a:off x="4434840" y="1645920"/>
-            <a:ext cx="3337560" cy="4389120"/>
-          </a:xfrm>
-          <a:prstGeom prst="roundRect">
-            <a:avLst/>
-          </a:prstGeom>
-          <a:solidFill>
-            <a:srgbClr val="1E1E24"/>
-          </a:solidFill>
-          <a:ln w="19050">
-            <a:solidFill>
-              <a:srgbClr val="6366F1"/>
-            </a:solidFill>
-          </a:ln>
-        </p:spPr>
-        <p:style>
-          <a:lnRef idx="1">
-            <a:schemeClr val="accent1"/>
-          </a:lnRef>
-          <a:fillRef idx="3">
-            <a:schemeClr val="accent1"/>
-          </a:fillRef>
-          <a:effectRef idx="2">
-            <a:schemeClr val="accent1"/>
-          </a:effectRef>
-          <a:fontRef idx="minor">
-            <a:schemeClr val="lt1"/>
-          </a:fontRef>
-        </p:style>
-        <p:txBody>
-          <a:bodyPr rtlCol="0" anchor="ctr"/>
-          <a:lstStyle/>
-          <a:p>
-            <a:pPr algn="ctr"/>
-          </a:p>
-        </p:txBody>
-      </p:sp>
-      <p:sp>
-        <p:nvSpPr>
-          <p:cNvPr id="7" name="TextBox 6"/>
-          <p:cNvSpPr txBox="1"/>
-          <p:nvPr/>
-        </p:nvSpPr>
-        <p:spPr>
-          <a:xfrm>
-            <a:off x="4617720" y="1920240"/>
-            <a:ext cx="2971800" cy="3840480"/>
+              <a:t>Decision Boundary Approaches</a:t>
+            </a:r>
+          </a:p>
+          <a:p>
+            <a:pPr>
+              <a:spcAft>
+                <a:spcPts val="800"/>
+              </a:spcAft>
+              <a:defRPr sz="1300">
+                <a:solidFill>
+                  <a:srgbClr val="A1A1AA"/>
+                </a:solidFill>
+                <a:latin typeface="Arial"/>
+              </a:defRPr>
+            </a:pPr>
+            <a:r>
+              <a:t>Logistic Regression: Maps inputs to probabilities using the Sigmoid function: 1 / (1 + e^-z).</a:t>
+            </a:r>
+          </a:p>
+          <a:p>
+            <a:pPr>
+              <a:spcAft>
+                <a:spcPts val="800"/>
+              </a:spcAft>
+              <a:defRPr sz="1300">
+                <a:solidFill>
+                  <a:srgbClr val="A1A1AA"/>
+                </a:solidFill>
+                <a:latin typeface="Arial"/>
+              </a:defRPr>
+            </a:pPr>
+            <a:r>
+              <a:t>K-Nearest Neighbors (KNN): Non-parametric model. Classifies a query point based on distance-weighted votes of its K closest neighbors.</a:t>
+            </a:r>
+          </a:p>
+          <a:p>
+            <a:pPr>
+              <a:spcAft>
+                <a:spcPts val="800"/>
+              </a:spcAft>
+              <a:defRPr sz="1300">
+                <a:solidFill>
+                  <a:srgbClr val="A1A1AA"/>
+                </a:solidFill>
+                <a:latin typeface="Arial"/>
+              </a:defRPr>
+            </a:pPr>
+            <a:r>
+              <a:t>Support Vector Machines (SVM): Finds a hyperplane that maximizes the margin between classes. Employs the Kernel Trick for non-linear boundaries.</a:t>
+            </a:r>
+          </a:p>
+          <a:p>
+            <a:pPr>
+              <a:spcAft>
+                <a:spcPts val="800"/>
+              </a:spcAft>
+              <a:defRPr sz="1300">
+                <a:solidFill>
+                  <a:srgbClr val="A1A1AA"/>
+                </a:solidFill>
+                <a:latin typeface="Arial"/>
+              </a:defRPr>
+            </a:pPr>
+            <a:r>
+              <a:t>Naive Bayes: Probabilistic classifier based on Bayes Theorem. Assumes strong conditional independence among features.</a:t>
+            </a:r>
+          </a:p>
+          <a:p>
+            <a:pPr>
+              <a:spcAft>
+                <a:spcPts val="800"/>
+              </a:spcAft>
+              <a:defRPr sz="1300">
+                <a:solidFill>
+                  <a:srgbClr val="A1A1AA"/>
+                </a:solidFill>
+                <a:latin typeface="Arial"/>
+              </a:defRPr>
+            </a:pPr>
+            <a:r>
+              <a:t>Visual: Multi-class decision boundaries of Scikit-Learn models on the Iris dataset.</a:t>
+            </a:r>
+          </a:p>
+        </p:txBody>
+      </p:sp>
+      <p:pic>
+        <p:nvPicPr>
+          <p:cNvPr id="6" name="Picture 5" descr="classification_decision_boundaries.png"/>
+          <p:cNvPicPr>
+            <a:picLocks noChangeAspect="1"/>
+          </p:cNvPicPr>
+          <p:nvPr/>
+        </p:nvPicPr>
+        <p:blipFill>
+          <a:blip r:embed="rId2"/>
+          <a:stretch>
+            <a:fillRect/>
+          </a:stretch>
+        </p:blipFill>
+        <p:spPr>
+          <a:xfrm>
+            <a:off x="6812280" y="1645920"/>
+            <a:ext cx="4389120" cy="4389120"/>
           </a:xfrm>
           <a:prstGeom prst="rect">
             <a:avLst/>
           </a:prstGeom>
-          <a:noFill/>
-        </p:spPr>
-        <p:txBody>
-          <a:bodyPr wrap="square">
-            <a:spAutoFit/>
-          </a:bodyPr>
-          <a:lstStyle/>
-          <a:p>
-            <a:pPr>
-              <a:spcAft>
-                <a:spcPts val="1400"/>
-              </a:spcAft>
-              <a:defRPr sz="2200" b="1">
-                <a:solidFill>
-                  <a:srgbClr val="6366F1"/>
-                </a:solidFill>
-                <a:latin typeface="Arial"/>
-              </a:defRPr>
-            </a:pPr>
-            <a:r>
-              <a:t>K-Nearest Neighbors</a:t>
-            </a:r>
-          </a:p>
-          <a:p>
-            <a:pPr>
-              <a:spcAft>
-                <a:spcPts val="1000"/>
-              </a:spcAft>
-              <a:defRPr sz="1500">
-                <a:solidFill>
-                  <a:srgbClr val="A1A1AA"/>
-                </a:solidFill>
-              </a:defRPr>
-            </a:pPr>
-            <a:r>
-              <a:t>Non-parametric lazy learner. Classifies samples based on distance voting (e.g. Euclidean) of K nearest points.</a:t>
-            </a:r>
-          </a:p>
-        </p:txBody>
-      </p:sp>
-      <p:sp>
-        <p:nvSpPr>
-          <p:cNvPr id="8" name="Rounded Rectangle 7"/>
-          <p:cNvSpPr/>
-          <p:nvPr/>
-        </p:nvSpPr>
-        <p:spPr>
-          <a:xfrm>
-            <a:off x="8138160" y="1645920"/>
-            <a:ext cx="3337560" cy="4389120"/>
-          </a:xfrm>
-          <a:prstGeom prst="roundRect">
-            <a:avLst/>
-          </a:prstGeom>
-          <a:solidFill>
-            <a:srgbClr val="1E1E24"/>
-          </a:solidFill>
-          <a:ln w="19050">
-            <a:solidFill>
-              <a:srgbClr val="F59E0B"/>
-            </a:solidFill>
-          </a:ln>
-        </p:spPr>
-        <p:style>
-          <a:lnRef idx="1">
-            <a:schemeClr val="accent1"/>
-          </a:lnRef>
-          <a:fillRef idx="3">
-            <a:schemeClr val="accent1"/>
-          </a:fillRef>
-          <a:effectRef idx="2">
-            <a:schemeClr val="accent1"/>
-          </a:effectRef>
-          <a:fontRef idx="minor">
-            <a:schemeClr val="lt1"/>
-          </a:fontRef>
-        </p:style>
-        <p:txBody>
-          <a:bodyPr rtlCol="0" anchor="ctr"/>
-          <a:lstStyle/>
-          <a:p>
-            <a:pPr algn="ctr"/>
-          </a:p>
-        </p:txBody>
-      </p:sp>
-      <p:sp>
-        <p:nvSpPr>
-          <p:cNvPr id="9" name="TextBox 8"/>
-          <p:cNvSpPr txBox="1"/>
-          <p:nvPr/>
-        </p:nvSpPr>
-        <p:spPr>
-          <a:xfrm>
-            <a:off x="8321040" y="1920240"/>
-            <a:ext cx="2971800" cy="3840480"/>
-          </a:xfrm>
-          <a:prstGeom prst="rect">
-            <a:avLst/>
-          </a:prstGeom>
-          <a:noFill/>
-        </p:spPr>
-        <p:txBody>
-          <a:bodyPr wrap="square">
-            <a:spAutoFit/>
-          </a:bodyPr>
-          <a:lstStyle/>
-          <a:p>
-            <a:pPr>
-              <a:spcAft>
-                <a:spcPts val="1400"/>
-              </a:spcAft>
-              <a:defRPr sz="2200" b="1">
-                <a:solidFill>
-                  <a:srgbClr val="F59E0B"/>
-                </a:solidFill>
-                <a:latin typeface="Arial"/>
-              </a:defRPr>
-            </a:pPr>
-            <a:r>
-              <a:t>Support Vector Machines</a:t>
-            </a:r>
-          </a:p>
-          <a:p>
-            <a:pPr>
-              <a:spcAft>
-                <a:spcPts val="1000"/>
-              </a:spcAft>
-              <a:defRPr sz="1500">
-                <a:solidFill>
-                  <a:srgbClr val="A1A1AA"/>
-                </a:solidFill>
-              </a:defRPr>
-            </a:pPr>
-            <a:r>
-              <a:t>Identifies the separating hyperplane with the maximum margin. Employs the Kernel Trick for non-linear boundaries.</a:t>
-            </a:r>
-          </a:p>
-        </p:txBody>
-      </p:sp>
+        </p:spPr>
+      </p:pic>
     </p:spTree>
   </p:cSld>
   <p:clrMapOvr>
@@ -5314,7 +8406,7 @@
               </a:defRPr>
             </a:pPr>
             <a:r>
-              <a:t>MACHINE LEARNING FUNDAMENTALS</a:t>
+              <a:t>MODULE 4: SUPERVISED CLASSIFICATION</a:t>
             </a:r>
           </a:p>
         </p:txBody>
@@ -5342,7 +8434,7 @@
           <a:lstStyle/>
           <a:p>
             <a:pPr>
-              <a:defRPr sz="3200" b="1">
+              <a:defRPr sz="3000" b="1">
                 <a:solidFill>
                   <a:srgbClr val="F8FAFC"/>
                 </a:solidFill>
@@ -5350,7 +8442,7 @@
               </a:defRPr>
             </a:pPr>
             <a:r>
-              <a:t>Tree-Based Models &amp; Bagging</a:t>
+              <a:t>Distance Metrics &amp; Vector Spatial Relations</a:t>
             </a:r>
           </a:p>
         </p:txBody>
@@ -5364,7 +8456,7 @@
         <p:spPr>
           <a:xfrm>
             <a:off x="731520" y="1645920"/>
-            <a:ext cx="5029200" cy="4389120"/>
+            <a:ext cx="5486400" cy="4389120"/>
           </a:xfrm>
           <a:prstGeom prst="roundRect">
             <a:avLst/>
@@ -5374,7 +8466,7 @@
           </a:solidFill>
           <a:ln w="19050">
             <a:solidFill>
-              <a:srgbClr val="6366F1"/>
+              <a:srgbClr val="F59E0B"/>
             </a:solidFill>
           </a:ln>
         </p:spPr>
@@ -5408,8 +8500,8 @@
         </p:nvSpPr>
         <p:spPr>
           <a:xfrm>
-            <a:off x="1005840" y="1828800"/>
-            <a:ext cx="4480560" cy="4023360"/>
+            <a:off x="914400" y="1828800"/>
+            <a:ext cx="5120640" cy="4023360"/>
           </a:xfrm>
           <a:prstGeom prst="rect">
             <a:avLst/>
@@ -5426,7 +8518,7 @@
               <a:spcAft>
                 <a:spcPts val="1200"/>
               </a:spcAft>
-              <a:defRPr sz="2200" b="1">
+              <a:defRPr sz="2000" b="1">
                 <a:solidFill>
                   <a:srgbClr val="14B8A6"/>
                 </a:solidFill>
@@ -5434,215 +8526,115 @@
               </a:defRPr>
             </a:pPr>
             <a:r>
-              <a:t>Decision Trees</a:t>
-            </a:r>
-          </a:p>
-          <a:p>
-            <a:pPr>
-              <a:spcAft>
-                <a:spcPts val="1000"/>
-              </a:spcAft>
-              <a:defRPr sz="1500">
-                <a:solidFill>
-                  <a:srgbClr val="A1A1AA"/>
-                </a:solidFill>
-              </a:defRPr>
-            </a:pPr>
-            <a:r>
-              <a:t>• Split features recursively to maximize homogeneity.</a:t>
-            </a:r>
-          </a:p>
-          <a:p>
-            <a:pPr>
-              <a:spcAft>
-                <a:spcPts val="1000"/>
-              </a:spcAft>
-              <a:defRPr sz="1500">
-                <a:solidFill>
-                  <a:srgbClr val="A1A1AA"/>
-                </a:solidFill>
-              </a:defRPr>
-            </a:pPr>
-            <a:r>
-              <a:t>• Splitting Metric: Entropy (Information Gain) or Gini Impurity.</a:t>
-            </a:r>
-          </a:p>
-          <a:p>
-            <a:pPr>
-              <a:spcAft>
-                <a:spcPts val="1000"/>
-              </a:spcAft>
-              <a:defRPr sz="1500">
-                <a:solidFill>
-                  <a:srgbClr val="A1A1AA"/>
-                </a:solidFill>
-              </a:defRPr>
-            </a:pPr>
-            <a:r>
-              <a:t>• Highly intuitive and easy to interpret (rules can be visualized).</a:t>
-            </a:r>
-          </a:p>
-          <a:p>
-            <a:pPr>
-              <a:spcAft>
-                <a:spcPts val="1000"/>
-              </a:spcAft>
-              <a:defRPr sz="1500">
-                <a:solidFill>
-                  <a:srgbClr val="A1A1AA"/>
-                </a:solidFill>
-              </a:defRPr>
-            </a:pPr>
-            <a:r>
-              <a:t>• Prone to overfitting (creates deep, highly specific trees).</a:t>
-            </a:r>
-          </a:p>
-        </p:txBody>
-      </p:sp>
-      <p:sp>
-        <p:nvSpPr>
-          <p:cNvPr id="6" name="Rounded Rectangle 5"/>
-          <p:cNvSpPr/>
-          <p:nvPr/>
-        </p:nvSpPr>
-        <p:spPr>
-          <a:xfrm>
-            <a:off x="6400800" y="1645920"/>
-            <a:ext cx="5029200" cy="4389120"/>
-          </a:xfrm>
-          <a:prstGeom prst="roundRect">
-            <a:avLst/>
-          </a:prstGeom>
-          <a:solidFill>
-            <a:srgbClr val="1E1E24"/>
-          </a:solidFill>
-          <a:ln w="19050">
-            <a:solidFill>
-              <a:srgbClr val="6366F1"/>
-            </a:solidFill>
-          </a:ln>
-        </p:spPr>
-        <p:style>
-          <a:lnRef idx="1">
-            <a:schemeClr val="accent1"/>
-          </a:lnRef>
-          <a:fillRef idx="3">
-            <a:schemeClr val="accent1"/>
-          </a:fillRef>
-          <a:effectRef idx="2">
-            <a:schemeClr val="accent1"/>
-          </a:effectRef>
-          <a:fontRef idx="minor">
-            <a:schemeClr val="lt1"/>
-          </a:fontRef>
-        </p:style>
-        <p:txBody>
-          <a:bodyPr rtlCol="0" anchor="ctr"/>
-          <a:lstStyle/>
-          <a:p>
-            <a:pPr algn="ctr"/>
-          </a:p>
-        </p:txBody>
-      </p:sp>
-      <p:sp>
-        <p:nvSpPr>
-          <p:cNvPr id="7" name="TextBox 6"/>
-          <p:cNvSpPr txBox="1"/>
-          <p:nvPr/>
-        </p:nvSpPr>
-        <p:spPr>
-          <a:xfrm>
-            <a:off x="6675120" y="1828800"/>
-            <a:ext cx="4480560" cy="4023360"/>
+              <a:t>Quantifying Geometric Closeness</a:t>
+            </a:r>
+          </a:p>
+          <a:p>
+            <a:pPr>
+              <a:spcAft>
+                <a:spcPts val="800"/>
+              </a:spcAft>
+              <a:defRPr sz="1300">
+                <a:solidFill>
+                  <a:srgbClr val="A1A1AA"/>
+                </a:solidFill>
+                <a:latin typeface="Arial"/>
+              </a:defRPr>
+            </a:pPr>
+            <a:r>
+              <a:t>Euclidean Distance: Straight-line (L2 norm) distance. Sensitive to large coordinate deviations.</a:t>
+            </a:r>
+          </a:p>
+          <a:p>
+            <a:pPr>
+              <a:spcAft>
+                <a:spcPts val="800"/>
+              </a:spcAft>
+              <a:defRPr sz="1300">
+                <a:solidFill>
+                  <a:srgbClr val="A1A1AA"/>
+                </a:solidFill>
+                <a:latin typeface="Arial"/>
+              </a:defRPr>
+            </a:pPr>
+            <a:r>
+              <a:t>Manhattan Distance: Grid-based (L1 norm) distance. Sum of absolute differences along coordinate axes.</a:t>
+            </a:r>
+          </a:p>
+          <a:p>
+            <a:pPr>
+              <a:spcAft>
+                <a:spcPts val="800"/>
+              </a:spcAft>
+              <a:defRPr sz="1300">
+                <a:solidFill>
+                  <a:srgbClr val="A1A1AA"/>
+                </a:solidFill>
+                <a:latin typeface="Arial"/>
+              </a:defRPr>
+            </a:pPr>
+            <a:r>
+              <a:t>Cosine Similarity: Measures the angular alignment between two vectors. Independent of vector magnitude (widely used in text/embeddings).</a:t>
+            </a:r>
+          </a:p>
+          <a:p>
+            <a:pPr>
+              <a:spcAft>
+                <a:spcPts val="800"/>
+              </a:spcAft>
+              <a:defRPr sz="1300">
+                <a:solidFill>
+                  <a:srgbClr val="A1A1AA"/>
+                </a:solidFill>
+                <a:latin typeface="Arial"/>
+              </a:defRPr>
+            </a:pPr>
+            <a:r>
+              <a:t>Chebyshev Distance: Maximum absolute coordinate difference (L-infinity norm).</a:t>
+            </a:r>
+          </a:p>
+          <a:p>
+            <a:pPr>
+              <a:spcAft>
+                <a:spcPts val="800"/>
+              </a:spcAft>
+              <a:defRPr sz="1300">
+                <a:solidFill>
+                  <a:srgbClr val="A1A1AA"/>
+                </a:solidFill>
+                <a:latin typeface="Arial"/>
+              </a:defRPr>
+            </a:pPr>
+            <a:r>
+              <a:t>Visual: Distance metric bounds (Circle, Diamond, Square) in a 2D coordinate space.</a:t>
+            </a:r>
+          </a:p>
+        </p:txBody>
+      </p:sp>
+      <p:pic>
+        <p:nvPicPr>
+          <p:cNvPr id="6" name="Picture 5" descr="distance_metrics.png"/>
+          <p:cNvPicPr>
+            <a:picLocks noChangeAspect="1"/>
+          </p:cNvPicPr>
+          <p:nvPr/>
+        </p:nvPicPr>
+        <p:blipFill>
+          <a:blip r:embed="rId2"/>
+          <a:stretch>
+            <a:fillRect/>
+          </a:stretch>
+        </p:blipFill>
+        <p:spPr>
+          <a:xfrm>
+            <a:off x="6812280" y="1645920"/>
+            <a:ext cx="4389120" cy="4389120"/>
           </a:xfrm>
           <a:prstGeom prst="rect">
             <a:avLst/>
           </a:prstGeom>
-          <a:noFill/>
-        </p:spPr>
-        <p:txBody>
-          <a:bodyPr wrap="square">
-            <a:spAutoFit/>
-          </a:bodyPr>
-          <a:lstStyle/>
-          <a:p>
-            <a:pPr>
-              <a:spcAft>
-                <a:spcPts val="1200"/>
-              </a:spcAft>
-              <a:defRPr sz="2200" b="1">
-                <a:solidFill>
-                  <a:srgbClr val="6366F1"/>
-                </a:solidFill>
-                <a:latin typeface="Arial"/>
-              </a:defRPr>
-            </a:pPr>
-            <a:r>
-              <a:t>Random Forest (Bagging)</a:t>
-            </a:r>
-          </a:p>
-          <a:p>
-            <a:pPr>
-              <a:spcAft>
-                <a:spcPts val="1000"/>
-              </a:spcAft>
-              <a:defRPr sz="1500">
-                <a:solidFill>
-                  <a:srgbClr val="A1A1AA"/>
-                </a:solidFill>
-              </a:defRPr>
-            </a:pPr>
-            <a:r>
-              <a:t>• Ensemble of independent Decision Trees trained in parallel.</a:t>
-            </a:r>
-          </a:p>
-          <a:p>
-            <a:pPr>
-              <a:spcAft>
-                <a:spcPts val="1000"/>
-              </a:spcAft>
-              <a:defRPr sz="1500">
-                <a:solidFill>
-                  <a:srgbClr val="A1A1AA"/>
-                </a:solidFill>
-              </a:defRPr>
-            </a:pPr>
-            <a:r>
-              <a:t>• Bootstrapping: Each tree trains on a random subset of rows.</a:t>
-            </a:r>
-          </a:p>
-          <a:p>
-            <a:pPr>
-              <a:spcAft>
-                <a:spcPts val="1000"/>
-              </a:spcAft>
-              <a:defRPr sz="1500">
-                <a:solidFill>
-                  <a:srgbClr val="A1A1AA"/>
-                </a:solidFill>
-              </a:defRPr>
-            </a:pPr>
-            <a:r>
-              <a:t>• Feature Subspacing: Each split considers a random subset of columns.</a:t>
-            </a:r>
-          </a:p>
-          <a:p>
-            <a:pPr>
-              <a:spcAft>
-                <a:spcPts val="1000"/>
-              </a:spcAft>
-              <a:defRPr sz="1500">
-                <a:solidFill>
-                  <a:srgbClr val="A1A1AA"/>
-                </a:solidFill>
-              </a:defRPr>
-            </a:pPr>
-            <a:r>
-              <a:t>• Averages individual trees (reduces variance/overfitting).</a:t>
-            </a:r>
-          </a:p>
-        </p:txBody>
-      </p:sp>
+        </p:spPr>
+      </p:pic>
     </p:spTree>
   </p:cSld>
   <p:clrMapOvr>
@@ -5700,7 +8692,7 @@
               </a:defRPr>
             </a:pPr>
             <a:r>
-              <a:t>MACHINE LEARNING FUNDAMENTALS</a:t>
+              <a:t>MODULE 4: SUPERVISED CLASSIFICATION</a:t>
             </a:r>
           </a:p>
         </p:txBody>
@@ -5728,7 +8720,7 @@
           <a:lstStyle/>
           <a:p>
             <a:pPr>
-              <a:defRPr sz="3200" b="1">
+              <a:defRPr sz="3000" b="1">
                 <a:solidFill>
                   <a:srgbClr val="F8FAFC"/>
                 </a:solidFill>
@@ -5736,7 +8728,7 @@
               </a:defRPr>
             </a:pPr>
             <a:r>
-              <a:t>Boosting Paradigms &amp; XGBoost</a:t>
+              <a:t>Tree-Based Models &amp; Bagging Ensembles</a:t>
             </a:r>
           </a:p>
         </p:txBody>
@@ -5750,7 +8742,7 @@
         <p:spPr>
           <a:xfrm>
             <a:off x="731520" y="1645920"/>
-            <a:ext cx="5029200" cy="4389120"/>
+            <a:ext cx="5486400" cy="4389120"/>
           </a:xfrm>
           <a:prstGeom prst="roundRect">
             <a:avLst/>
@@ -5760,7 +8752,7 @@
           </a:solidFill>
           <a:ln w="19050">
             <a:solidFill>
-              <a:srgbClr val="6366F1"/>
+              <a:srgbClr val="14B8A6"/>
             </a:solidFill>
           </a:ln>
         </p:spPr>
@@ -5794,8 +8786,8 @@
         </p:nvSpPr>
         <p:spPr>
           <a:xfrm>
-            <a:off x="1005840" y="1828800"/>
-            <a:ext cx="4480560" cy="4023360"/>
+            <a:off x="914400" y="1828800"/>
+            <a:ext cx="5120640" cy="4023360"/>
           </a:xfrm>
           <a:prstGeom prst="rect">
             <a:avLst/>
@@ -5812,7 +8804,7 @@
               <a:spcAft>
                 <a:spcPts val="1200"/>
               </a:spcAft>
-              <a:defRPr sz="2200" b="1">
+              <a:defRPr sz="2000" b="1">
                 <a:solidFill>
                   <a:srgbClr val="14B8A6"/>
                 </a:solidFill>
@@ -5820,215 +8812,131 @@
               </a:defRPr>
             </a:pPr>
             <a:r>
-              <a:t>Boosting Concept</a:t>
-            </a:r>
-          </a:p>
-          <a:p>
-            <a:pPr>
-              <a:spcAft>
-                <a:spcPts val="1000"/>
-              </a:spcAft>
-              <a:defRPr sz="1500">
-                <a:solidFill>
-                  <a:srgbClr val="A1A1AA"/>
-                </a:solidFill>
-              </a:defRPr>
-            </a:pPr>
-            <a:r>
-              <a:t>• Sequential learning: Models are trained step-by-step.</a:t>
-            </a:r>
-          </a:p>
-          <a:p>
-            <a:pPr>
-              <a:spcAft>
-                <a:spcPts val="1000"/>
-              </a:spcAft>
-              <a:defRPr sz="1500">
-                <a:solidFill>
-                  <a:srgbClr val="A1A1AA"/>
-                </a:solidFill>
-              </a:defRPr>
-            </a:pPr>
-            <a:r>
-              <a:t>• Each tree fits the residual errors of prior models.</a:t>
-            </a:r>
-          </a:p>
-          <a:p>
-            <a:pPr>
-              <a:spcAft>
-                <a:spcPts val="1000"/>
-              </a:spcAft>
-              <a:defRPr sz="1500">
-                <a:solidFill>
-                  <a:srgbClr val="A1A1AA"/>
-                </a:solidFill>
-              </a:defRPr>
-            </a:pPr>
-            <a:r>
-              <a:t>• Reduces bias (improves fit on complex datasets).</a:t>
-            </a:r>
-          </a:p>
-          <a:p>
-            <a:pPr>
-              <a:spcAft>
-                <a:spcPts val="1000"/>
-              </a:spcAft>
-              <a:defRPr sz="1500">
-                <a:solidFill>
-                  <a:srgbClr val="A1A1AA"/>
-                </a:solidFill>
-              </a:defRPr>
-            </a:pPr>
-            <a:r>
-              <a:t>• Requires careful learning rate (shrinkage) tuning.</a:t>
-            </a:r>
-          </a:p>
-        </p:txBody>
-      </p:sp>
-      <p:sp>
-        <p:nvSpPr>
-          <p:cNvPr id="6" name="Rounded Rectangle 5"/>
-          <p:cNvSpPr/>
-          <p:nvPr/>
-        </p:nvSpPr>
-        <p:spPr>
-          <a:xfrm>
-            <a:off x="6400800" y="1645920"/>
-            <a:ext cx="5029200" cy="4389120"/>
-          </a:xfrm>
-          <a:prstGeom prst="roundRect">
-            <a:avLst/>
-          </a:prstGeom>
-          <a:solidFill>
-            <a:srgbClr val="1E1E24"/>
-          </a:solidFill>
-          <a:ln w="19050">
-            <a:solidFill>
-              <a:srgbClr val="6366F1"/>
-            </a:solidFill>
-          </a:ln>
-        </p:spPr>
-        <p:style>
-          <a:lnRef idx="1">
-            <a:schemeClr val="accent1"/>
-          </a:lnRef>
-          <a:fillRef idx="3">
-            <a:schemeClr val="accent1"/>
-          </a:fillRef>
-          <a:effectRef idx="2">
-            <a:schemeClr val="accent1"/>
-          </a:effectRef>
-          <a:fontRef idx="minor">
-            <a:schemeClr val="lt1"/>
-          </a:fontRef>
-        </p:style>
-        <p:txBody>
-          <a:bodyPr rtlCol="0" anchor="ctr"/>
-          <a:lstStyle/>
-          <a:p>
-            <a:pPr algn="ctr"/>
-          </a:p>
-        </p:txBody>
-      </p:sp>
-      <p:sp>
-        <p:nvSpPr>
-          <p:cNvPr id="7" name="TextBox 6"/>
-          <p:cNvSpPr txBox="1"/>
-          <p:nvPr/>
-        </p:nvSpPr>
-        <p:spPr>
-          <a:xfrm>
-            <a:off x="6675120" y="1828800"/>
-            <a:ext cx="4480560" cy="4023360"/>
+              <a:t>Recursive Splits &amp; Forest Aggregation</a:t>
+            </a:r>
+          </a:p>
+          <a:p>
+            <a:pPr>
+              <a:spcAft>
+                <a:spcPts val="800"/>
+              </a:spcAft>
+              <a:defRPr sz="1300">
+                <a:solidFill>
+                  <a:srgbClr val="A1A1AA"/>
+                </a:solidFill>
+                <a:latin typeface="Arial"/>
+              </a:defRPr>
+            </a:pPr>
+            <a:r>
+              <a:t>Decision Trees: Splits features recursively to maximize sample purity.</a:t>
+            </a:r>
+          </a:p>
+          <a:p>
+            <a:pPr>
+              <a:spcAft>
+                <a:spcPts val="800"/>
+              </a:spcAft>
+              <a:defRPr sz="1300">
+                <a:solidFill>
+                  <a:srgbClr val="A1A1AA"/>
+                </a:solidFill>
+                <a:latin typeface="Arial"/>
+              </a:defRPr>
+            </a:pPr>
+            <a:r>
+              <a:t>Purity Metrics: Evaluated using Gini Impurity or Entropy (Information Gain). Highly prone to overfitting.</a:t>
+            </a:r>
+          </a:p>
+          <a:p>
+            <a:pPr>
+              <a:spcAft>
+                <a:spcPts val="800"/>
+              </a:spcAft>
+              <a:defRPr sz="1300">
+                <a:solidFill>
+                  <a:srgbClr val="A1A1AA"/>
+                </a:solidFill>
+                <a:latin typeface="Arial"/>
+              </a:defRPr>
+            </a:pPr>
+            <a:r>
+              <a:t>Random Forest Ensemble: Trains multiple independent trees in parallel.</a:t>
+            </a:r>
+          </a:p>
+          <a:p>
+            <a:pPr>
+              <a:spcAft>
+                <a:spcPts val="800"/>
+              </a:spcAft>
+              <a:defRPr sz="1300">
+                <a:solidFill>
+                  <a:srgbClr val="A1A1AA"/>
+                </a:solidFill>
+                <a:latin typeface="Arial"/>
+              </a:defRPr>
+            </a:pPr>
+            <a:r>
+              <a:t>Bootstrapping: Each tree is trained on a random subset of rows (drawn with replacement).</a:t>
+            </a:r>
+          </a:p>
+          <a:p>
+            <a:pPr>
+              <a:spcAft>
+                <a:spcPts val="800"/>
+              </a:spcAft>
+              <a:defRPr sz="1300">
+                <a:solidFill>
+                  <a:srgbClr val="A1A1AA"/>
+                </a:solidFill>
+                <a:latin typeface="Arial"/>
+              </a:defRPr>
+            </a:pPr>
+            <a:r>
+              <a:t>Feature Subspacing: Selects a random subset of features (e.g. sqrt(D)) at each split to decorrelate tree errors.</a:t>
+            </a:r>
+          </a:p>
+          <a:p>
+            <a:pPr>
+              <a:spcAft>
+                <a:spcPts val="800"/>
+              </a:spcAft>
+              <a:defRPr sz="1300">
+                <a:solidFill>
+                  <a:srgbClr val="A1A1AA"/>
+                </a:solidFill>
+                <a:latin typeface="Arial"/>
+              </a:defRPr>
+            </a:pPr>
+            <a:r>
+              <a:t>Visual: Decision Tree splits vs. Random Forest averaged boundary.</a:t>
+            </a:r>
+          </a:p>
+        </p:txBody>
+      </p:sp>
+      <p:pic>
+        <p:nvPicPr>
+          <p:cNvPr id="6" name="Picture 5" descr="examples_4_decision_tree.png"/>
+          <p:cNvPicPr>
+            <a:picLocks noChangeAspect="1"/>
+          </p:cNvPicPr>
+          <p:nvPr/>
+        </p:nvPicPr>
+        <p:blipFill>
+          <a:blip r:embed="rId2"/>
+          <a:stretch>
+            <a:fillRect/>
+          </a:stretch>
+        </p:blipFill>
+        <p:spPr>
+          <a:xfrm>
+            <a:off x="6583680" y="2801983"/>
+            <a:ext cx="4846320" cy="2076994"/>
           </a:xfrm>
           <a:prstGeom prst="rect">
             <a:avLst/>
           </a:prstGeom>
-          <a:noFill/>
-        </p:spPr>
-        <p:txBody>
-          <a:bodyPr wrap="square">
-            <a:spAutoFit/>
-          </a:bodyPr>
-          <a:lstStyle/>
-          <a:p>
-            <a:pPr>
-              <a:spcAft>
-                <a:spcPts val="1200"/>
-              </a:spcAft>
-              <a:defRPr sz="2200" b="1">
-                <a:solidFill>
-                  <a:srgbClr val="6366F1"/>
-                </a:solidFill>
-                <a:latin typeface="Arial"/>
-              </a:defRPr>
-            </a:pPr>
-            <a:r>
-              <a:t>XGBoost (Extreme Gradient Boosting)</a:t>
-            </a:r>
-          </a:p>
-          <a:p>
-            <a:pPr>
-              <a:spcAft>
-                <a:spcPts val="1000"/>
-              </a:spcAft>
-              <a:defRPr sz="1500">
-                <a:solidFill>
-                  <a:srgbClr val="A1A1AA"/>
-                </a:solidFill>
-              </a:defRPr>
-            </a:pPr>
-            <a:r>
-              <a:t>• Regularized boosting: Incorporates L1 &amp; L2 penalties.</a:t>
-            </a:r>
-          </a:p>
-          <a:p>
-            <a:pPr>
-              <a:spcAft>
-                <a:spcPts val="1000"/>
-              </a:spcAft>
-              <a:defRPr sz="1500">
-                <a:solidFill>
-                  <a:srgbClr val="A1A1AA"/>
-                </a:solidFill>
-              </a:defRPr>
-            </a:pPr>
-            <a:r>
-              <a:t>• Highly optimized for speed and parallel CPU usage.</a:t>
-            </a:r>
-          </a:p>
-          <a:p>
-            <a:pPr>
-              <a:spcAft>
-                <a:spcPts val="1000"/>
-              </a:spcAft>
-              <a:defRPr sz="1500">
-                <a:solidFill>
-                  <a:srgbClr val="A1A1AA"/>
-                </a:solidFill>
-              </a:defRPr>
-            </a:pPr>
-            <a:r>
-              <a:t>• Automatic handling of missing values and sparse features.</a:t>
-            </a:r>
-          </a:p>
-          <a:p>
-            <a:pPr>
-              <a:spcAft>
-                <a:spcPts val="1000"/>
-              </a:spcAft>
-              <a:defRPr sz="1500">
-                <a:solidFill>
-                  <a:srgbClr val="A1A1AA"/>
-                </a:solidFill>
-              </a:defRPr>
-            </a:pPr>
-            <a:r>
-              <a:t>• Typically dominates tabular data competitions.</a:t>
-            </a:r>
-          </a:p>
-        </p:txBody>
-      </p:sp>
+        </p:spPr>
+      </p:pic>
     </p:spTree>
   </p:cSld>
   <p:clrMapOvr>
@@ -6086,7 +8994,7 @@
               </a:defRPr>
             </a:pPr>
             <a:r>
-              <a:t>MACHINE LEARNING FUNDAMENTALS</a:t>
+              <a:t>MODULE 5: ENSEMBLE LEARNING &amp; XGBOOST</a:t>
             </a:r>
           </a:p>
         </p:txBody>
@@ -6114,7 +9022,7 @@
           <a:lstStyle/>
           <a:p>
             <a:pPr>
-              <a:defRPr sz="3200" b="1">
+              <a:defRPr sz="3000" b="1">
                 <a:solidFill>
                   <a:srgbClr val="F8FAFC"/>
                 </a:solidFill>
@@ -6122,7 +9030,7 @@
               </a:defRPr>
             </a:pPr>
             <a:r>
-              <a:t>Clustering: Grouping Unlabeled Points</a:t>
+              <a:t>Boosting Paradigms &amp; XGBoost</a:t>
             </a:r>
           </a:p>
         </p:txBody>
@@ -6136,7 +9044,7 @@
         <p:spPr>
           <a:xfrm>
             <a:off x="731520" y="1645920"/>
-            <a:ext cx="3337560" cy="4389120"/>
+            <a:ext cx="5486400" cy="4389120"/>
           </a:xfrm>
           <a:prstGeom prst="roundRect">
             <a:avLst/>
@@ -6146,7 +9054,7 @@
           </a:solidFill>
           <a:ln w="19050">
             <a:solidFill>
-              <a:srgbClr val="14B8A6"/>
+              <a:srgbClr val="A855F7"/>
             </a:solidFill>
           </a:ln>
         </p:spPr>
@@ -6180,8 +9088,8 @@
         </p:nvSpPr>
         <p:spPr>
           <a:xfrm>
-            <a:off x="914400" y="1920240"/>
-            <a:ext cx="2971800" cy="3840480"/>
+            <a:off x="914400" y="1828800"/>
+            <a:ext cx="5120640" cy="4023360"/>
           </a:xfrm>
           <a:prstGeom prst="rect">
             <a:avLst/>
@@ -6196,9 +9104,9 @@
           <a:p>
             <a:pPr>
               <a:spcAft>
-                <a:spcPts val="1400"/>
-              </a:spcAft>
-              <a:defRPr sz="2200" b="1">
+                <a:spcPts val="1200"/>
+              </a:spcAft>
+              <a:defRPr sz="2000" b="1">
                 <a:solidFill>
                   <a:srgbClr val="14B8A6"/>
                 </a:solidFill>
@@ -6206,224 +9114,115 @@
               </a:defRPr>
             </a:pPr>
             <a:r>
-              <a:t>K-Means</a:t>
-            </a:r>
-          </a:p>
-          <a:p>
-            <a:pPr>
-              <a:spcAft>
-                <a:spcPts val="1000"/>
-              </a:spcAft>
-              <a:defRPr sz="1500">
-                <a:solidFill>
-                  <a:srgbClr val="A1A1AA"/>
-                </a:solidFill>
-              </a:defRPr>
-            </a:pPr>
-            <a:r>
-              <a:t>Partitions data into K clusters. Centroids are updated iteratively to minimize within-cluster sum of squares (Inertia). Choose K via Elbow Method.</a:t>
-            </a:r>
-          </a:p>
-        </p:txBody>
-      </p:sp>
-      <p:sp>
-        <p:nvSpPr>
-          <p:cNvPr id="6" name="Rounded Rectangle 5"/>
-          <p:cNvSpPr/>
-          <p:nvPr/>
-        </p:nvSpPr>
-        <p:spPr>
-          <a:xfrm>
-            <a:off x="4434840" y="1645920"/>
-            <a:ext cx="3337560" cy="4389120"/>
-          </a:xfrm>
-          <a:prstGeom prst="roundRect">
-            <a:avLst/>
-          </a:prstGeom>
-          <a:solidFill>
-            <a:srgbClr val="1E1E24"/>
-          </a:solidFill>
-          <a:ln w="19050">
-            <a:solidFill>
-              <a:srgbClr val="6366F1"/>
-            </a:solidFill>
-          </a:ln>
-        </p:spPr>
-        <p:style>
-          <a:lnRef idx="1">
-            <a:schemeClr val="accent1"/>
-          </a:lnRef>
-          <a:fillRef idx="3">
-            <a:schemeClr val="accent1"/>
-          </a:fillRef>
-          <a:effectRef idx="2">
-            <a:schemeClr val="accent1"/>
-          </a:effectRef>
-          <a:fontRef idx="minor">
-            <a:schemeClr val="lt1"/>
-          </a:fontRef>
-        </p:style>
-        <p:txBody>
-          <a:bodyPr rtlCol="0" anchor="ctr"/>
-          <a:lstStyle/>
-          <a:p>
-            <a:pPr algn="ctr"/>
-          </a:p>
-        </p:txBody>
-      </p:sp>
-      <p:sp>
-        <p:nvSpPr>
-          <p:cNvPr id="7" name="TextBox 6"/>
-          <p:cNvSpPr txBox="1"/>
-          <p:nvPr/>
-        </p:nvSpPr>
-        <p:spPr>
-          <a:xfrm>
-            <a:off x="4617720" y="1920240"/>
-            <a:ext cx="2971800" cy="3840480"/>
+              <a:t>Sequential Optimization</a:t>
+            </a:r>
+          </a:p>
+          <a:p>
+            <a:pPr>
+              <a:spcAft>
+                <a:spcPts val="800"/>
+              </a:spcAft>
+              <a:defRPr sz="1300">
+                <a:solidFill>
+                  <a:srgbClr val="A1A1AA"/>
+                </a:solidFill>
+                <a:latin typeface="Arial"/>
+              </a:defRPr>
+            </a:pPr>
+            <a:r>
+              <a:t>Sequential Learning: Weak learners (e.g. shallow decision trees) are trained sequentially rather than in parallel.</a:t>
+            </a:r>
+          </a:p>
+          <a:p>
+            <a:pPr>
+              <a:spcAft>
+                <a:spcPts val="800"/>
+              </a:spcAft>
+              <a:defRPr sz="1300">
+                <a:solidFill>
+                  <a:srgbClr val="A1A1AA"/>
+                </a:solidFill>
+                <a:latin typeface="Arial"/>
+              </a:defRPr>
+            </a:pPr>
+            <a:r>
+              <a:t>Residual Fitting: Each successive tree is trained to predict the residual errors (gradients) of the cumulative ensemble.</a:t>
+            </a:r>
+          </a:p>
+          <a:p>
+            <a:pPr>
+              <a:spcAft>
+                <a:spcPts val="800"/>
+              </a:spcAft>
+              <a:defRPr sz="1300">
+                <a:solidFill>
+                  <a:srgbClr val="A1A1AA"/>
+                </a:solidFill>
+                <a:latin typeface="Arial"/>
+              </a:defRPr>
+            </a:pPr>
+            <a:r>
+              <a:t>XGBoost (Extreme Gradient Boosting): Highly optimized library.</a:t>
+            </a:r>
+          </a:p>
+          <a:p>
+            <a:pPr>
+              <a:spcAft>
+                <a:spcPts val="800"/>
+              </a:spcAft>
+              <a:defRPr sz="1300">
+                <a:solidFill>
+                  <a:srgbClr val="A1A1AA"/>
+                </a:solidFill>
+                <a:latin typeface="Arial"/>
+              </a:defRPr>
+            </a:pPr>
+            <a:r>
+              <a:t>Regularized Objective: Incorporates L1 &amp; L2 parameter constraints directly into the split objective.</a:t>
+            </a:r>
+          </a:p>
+          <a:p>
+            <a:pPr>
+              <a:spcAft>
+                <a:spcPts val="800"/>
+              </a:spcAft>
+              <a:defRPr sz="1300">
+                <a:solidFill>
+                  <a:srgbClr val="A1A1AA"/>
+                </a:solidFill>
+                <a:latin typeface="Arial"/>
+              </a:defRPr>
+            </a:pPr>
+            <a:r>
+              <a:t>Implementation: Employs parallel split searches, block structures, and handles missing/sparse data automatically.</a:t>
+            </a:r>
+          </a:p>
+        </p:txBody>
+      </p:sp>
+      <p:pic>
+        <p:nvPicPr>
+          <p:cNvPr id="6" name="Picture 5" descr="bagging_vs_boosting.png"/>
+          <p:cNvPicPr>
+            <a:picLocks noChangeAspect="1"/>
+          </p:cNvPicPr>
+          <p:nvPr/>
+        </p:nvPicPr>
+        <p:blipFill>
+          <a:blip r:embed="rId2"/>
+          <a:stretch>
+            <a:fillRect/>
+          </a:stretch>
+        </p:blipFill>
+        <p:spPr>
+          <a:xfrm>
+            <a:off x="6812280" y="1645920"/>
+            <a:ext cx="4389120" cy="4389120"/>
           </a:xfrm>
           <a:prstGeom prst="rect">
             <a:avLst/>
           </a:prstGeom>
-          <a:noFill/>
-        </p:spPr>
-        <p:txBody>
-          <a:bodyPr wrap="square">
-            <a:spAutoFit/>
-          </a:bodyPr>
-          <a:lstStyle/>
-          <a:p>
-            <a:pPr>
-              <a:spcAft>
-                <a:spcPts val="1400"/>
-              </a:spcAft>
-              <a:defRPr sz="2200" b="1">
-                <a:solidFill>
-                  <a:srgbClr val="6366F1"/>
-                </a:solidFill>
-                <a:latin typeface="Arial"/>
-              </a:defRPr>
-            </a:pPr>
-            <a:r>
-              <a:t>Hierarchical</a:t>
-            </a:r>
-          </a:p>
-          <a:p>
-            <a:pPr>
-              <a:spcAft>
-                <a:spcPts val="1000"/>
-              </a:spcAft>
-              <a:defRPr sz="1500">
-                <a:solidFill>
-                  <a:srgbClr val="A1A1AA"/>
-                </a:solidFill>
-              </a:defRPr>
-            </a:pPr>
-            <a:r>
-              <a:t>Constructs tree-like dendrograms. Agglomerative (bottom-up) merges closest pairs using linkage criteria (Ward, Single, Complete).</a:t>
-            </a:r>
-          </a:p>
-        </p:txBody>
-      </p:sp>
-      <p:sp>
-        <p:nvSpPr>
-          <p:cNvPr id="8" name="Rounded Rectangle 7"/>
-          <p:cNvSpPr/>
-          <p:nvPr/>
-        </p:nvSpPr>
-        <p:spPr>
-          <a:xfrm>
-            <a:off x="8138160" y="1645920"/>
-            <a:ext cx="3337560" cy="4389120"/>
-          </a:xfrm>
-          <a:prstGeom prst="roundRect">
-            <a:avLst/>
-          </a:prstGeom>
-          <a:solidFill>
-            <a:srgbClr val="1E1E24"/>
-          </a:solidFill>
-          <a:ln w="19050">
-            <a:solidFill>
-              <a:srgbClr val="F59E0B"/>
-            </a:solidFill>
-          </a:ln>
-        </p:spPr>
-        <p:style>
-          <a:lnRef idx="1">
-            <a:schemeClr val="accent1"/>
-          </a:lnRef>
-          <a:fillRef idx="3">
-            <a:schemeClr val="accent1"/>
-          </a:fillRef>
-          <a:effectRef idx="2">
-            <a:schemeClr val="accent1"/>
-          </a:effectRef>
-          <a:fontRef idx="minor">
-            <a:schemeClr val="lt1"/>
-          </a:fontRef>
-        </p:style>
-        <p:txBody>
-          <a:bodyPr rtlCol="0" anchor="ctr"/>
-          <a:lstStyle/>
-          <a:p>
-            <a:pPr algn="ctr"/>
-          </a:p>
-        </p:txBody>
-      </p:sp>
-      <p:sp>
-        <p:nvSpPr>
-          <p:cNvPr id="9" name="TextBox 8"/>
-          <p:cNvSpPr txBox="1"/>
-          <p:nvPr/>
-        </p:nvSpPr>
-        <p:spPr>
-          <a:xfrm>
-            <a:off x="8321040" y="1920240"/>
-            <a:ext cx="2971800" cy="3840480"/>
-          </a:xfrm>
-          <a:prstGeom prst="rect">
-            <a:avLst/>
-          </a:prstGeom>
-          <a:noFill/>
-        </p:spPr>
-        <p:txBody>
-          <a:bodyPr wrap="square">
-            <a:spAutoFit/>
-          </a:bodyPr>
-          <a:lstStyle/>
-          <a:p>
-            <a:pPr>
-              <a:spcAft>
-                <a:spcPts val="1400"/>
-              </a:spcAft>
-              <a:defRPr sz="2200" b="1">
-                <a:solidFill>
-                  <a:srgbClr val="F59E0B"/>
-                </a:solidFill>
-                <a:latin typeface="Arial"/>
-              </a:defRPr>
-            </a:pPr>
-            <a:r>
-              <a:t>DBSCAN</a:t>
-            </a:r>
-          </a:p>
-          <a:p>
-            <a:pPr>
-              <a:spcAft>
-                <a:spcPts val="1000"/>
-              </a:spcAft>
-              <a:defRPr sz="1500">
-                <a:solidFill>
-                  <a:srgbClr val="A1A1AA"/>
-                </a:solidFill>
-              </a:defRPr>
-            </a:pPr>
-            <a:r>
-              <a:t>Density-based grouping. Finds core, border, and noise points using eps (neighborhood radius) &amp; min_samples. Captures complex shapes.</a:t>
-            </a:r>
-          </a:p>
-        </p:txBody>
-      </p:sp>
+        </p:spPr>
+      </p:pic>
     </p:spTree>
   </p:cSld>
   <p:clrMapOvr>
@@ -6481,7 +9280,7 @@
               </a:defRPr>
             </a:pPr>
             <a:r>
-              <a:t>MACHINE LEARNING FUNDAMENTALS</a:t>
+              <a:t>MODULE 6: UNSUPERVISED LEARNING</a:t>
             </a:r>
           </a:p>
         </p:txBody>
@@ -6509,7 +9308,7 @@
           <a:lstStyle/>
           <a:p>
             <a:pPr>
-              <a:defRPr sz="3200" b="1">
+              <a:defRPr sz="3000" b="1">
                 <a:solidFill>
                   <a:srgbClr val="F8FAFC"/>
                 </a:solidFill>
@@ -6517,7 +9316,7 @@
               </a:defRPr>
             </a:pPr>
             <a:r>
-              <a:t>Model Evaluation &amp; Generalization</a:t>
+              <a:t>Clustering: Grouping Unlabeled Points</a:t>
             </a:r>
           </a:p>
         </p:txBody>
@@ -6531,7 +9330,7 @@
         <p:spPr>
           <a:xfrm>
             <a:off x="731520" y="1645920"/>
-            <a:ext cx="5029200" cy="4389120"/>
+            <a:ext cx="5486400" cy="4389120"/>
           </a:xfrm>
           <a:prstGeom prst="roundRect">
             <a:avLst/>
@@ -6541,7 +9340,7 @@
           </a:solidFill>
           <a:ln w="19050">
             <a:solidFill>
-              <a:srgbClr val="6366F1"/>
+              <a:srgbClr val="14B8A6"/>
             </a:solidFill>
           </a:ln>
         </p:spPr>
@@ -6575,8 +9374,8 @@
         </p:nvSpPr>
         <p:spPr>
           <a:xfrm>
-            <a:off x="1005840" y="1828800"/>
-            <a:ext cx="4480560" cy="4023360"/>
+            <a:off x="914400" y="1828800"/>
+            <a:ext cx="5120640" cy="4023360"/>
           </a:xfrm>
           <a:prstGeom prst="rect">
             <a:avLst/>
@@ -6593,7 +9392,7 @@
               <a:spcAft>
                 <a:spcPts val="1200"/>
               </a:spcAft>
-              <a:defRPr sz="2200" b="1">
+              <a:defRPr sz="2000" b="1">
                 <a:solidFill>
                   <a:srgbClr val="14B8A6"/>
                 </a:solidFill>
@@ -6601,275 +9400,99 @@
               </a:defRPr>
             </a:pPr>
             <a:r>
-              <a:t>Bias-Variance Tradeoff</a:t>
-            </a:r>
-          </a:p>
-          <a:p>
-            <a:pPr>
-              <a:spcAft>
-                <a:spcPts val="1000"/>
-              </a:spcAft>
-              <a:defRPr sz="1400">
-                <a:solidFill>
-                  <a:srgbClr val="A1A1AA"/>
-                </a:solidFill>
-              </a:defRPr>
-            </a:pPr>
-            <a:r>
-              <a:t>• Underfitting (High Bias): Model is too simple to capture patterns. Fails on train and test sets.</a:t>
-            </a:r>
-          </a:p>
-          <a:p>
-            <a:pPr>
-              <a:spcAft>
-                <a:spcPts val="1000"/>
-              </a:spcAft>
-              <a:defRPr sz="1400">
-                <a:solidFill>
-                  <a:srgbClr val="A1A1AA"/>
-                </a:solidFill>
-              </a:defRPr>
-            </a:pPr>
-            <a:r>
-              <a:t>• Overfitting (High Variance): Model captures noise as rules. Scores high on train set, poorly on test set.</a:t>
-            </a:r>
-          </a:p>
-          <a:p>
-            <a:pPr>
-              <a:spcAft>
-                <a:spcPts val="1000"/>
-              </a:spcAft>
-              <a:defRPr sz="1400">
-                <a:solidFill>
-                  <a:srgbClr val="A1A1AA"/>
-                </a:solidFill>
-              </a:defRPr>
-            </a:pPr>
-            <a:r>
-              <a:t>• Goal: Find the sweet spot minimizing total error.</a:t>
-            </a:r>
-          </a:p>
-          <a:p>
-            <a:pPr>
-              <a:spcAft>
-                <a:spcPts val="1000"/>
-              </a:spcAft>
-              <a:defRPr sz="1400">
-                <a:solidFill>
-                  <a:srgbClr val="A1A1AA"/>
-                </a:solidFill>
-              </a:defRPr>
-            </a:pPr>
-            <a:r>
-              <a:t>• K-Fold Cross-Validation: Splits data K times to obtain robust performance estimations.</a:t>
-            </a:r>
-          </a:p>
-        </p:txBody>
-      </p:sp>
-      <p:sp>
-        <p:nvSpPr>
-          <p:cNvPr id="6" name="Rounded Rectangle 5"/>
-          <p:cNvSpPr/>
-          <p:nvPr/>
-        </p:nvSpPr>
-        <p:spPr>
-          <a:xfrm>
-            <a:off x="6400800" y="1645920"/>
-            <a:ext cx="5029200" cy="4389120"/>
-          </a:xfrm>
-          <a:prstGeom prst="roundRect">
-            <a:avLst/>
-          </a:prstGeom>
-          <a:solidFill>
-            <a:srgbClr val="1E1E24"/>
-          </a:solidFill>
-          <a:ln w="19050">
-            <a:solidFill>
-              <a:srgbClr val="6366F1"/>
-            </a:solidFill>
-          </a:ln>
-        </p:spPr>
-        <p:style>
-          <a:lnRef idx="1">
-            <a:schemeClr val="accent1"/>
-          </a:lnRef>
-          <a:fillRef idx="3">
-            <a:schemeClr val="accent1"/>
-          </a:fillRef>
-          <a:effectRef idx="2">
-            <a:schemeClr val="accent1"/>
-          </a:effectRef>
-          <a:fontRef idx="minor">
-            <a:schemeClr val="lt1"/>
-          </a:fontRef>
-        </p:style>
-        <p:txBody>
-          <a:bodyPr rtlCol="0" anchor="ctr"/>
-          <a:lstStyle/>
-          <a:p>
-            <a:pPr algn="ctr"/>
-          </a:p>
-        </p:txBody>
-      </p:sp>
-      <p:sp>
-        <p:nvSpPr>
-          <p:cNvPr id="7" name="TextBox 6"/>
-          <p:cNvSpPr txBox="1"/>
-          <p:nvPr/>
-        </p:nvSpPr>
-        <p:spPr>
-          <a:xfrm>
-            <a:off x="6675120" y="1828800"/>
-            <a:ext cx="4480560" cy="4023360"/>
+              <a:t>Unsupervised Spatial Grouping</a:t>
+            </a:r>
+          </a:p>
+          <a:p>
+            <a:pPr>
+              <a:spcAft>
+                <a:spcPts val="800"/>
+              </a:spcAft>
+              <a:defRPr sz="1300">
+                <a:solidFill>
+                  <a:srgbClr val="A1A1AA"/>
+                </a:solidFill>
+                <a:latin typeface="Arial"/>
+              </a:defRPr>
+            </a:pPr>
+            <a:r>
+              <a:t>K-Means: Partitions data into K clusters. Iteratively updates cluster centroids to minimize within-cluster sum of squares (Inertia).</a:t>
+            </a:r>
+          </a:p>
+          <a:p>
+            <a:pPr>
+              <a:spcAft>
+                <a:spcPts val="800"/>
+              </a:spcAft>
+              <a:defRPr sz="1300">
+                <a:solidFill>
+                  <a:srgbClr val="A1A1AA"/>
+                </a:solidFill>
+                <a:latin typeface="Arial"/>
+              </a:defRPr>
+            </a:pPr>
+            <a:r>
+              <a:t>Hierarchical Clustering: Builds nested tree structures (dendrograms) via agglomerative (bottom-up) merges.</a:t>
+            </a:r>
+          </a:p>
+          <a:p>
+            <a:pPr>
+              <a:spcAft>
+                <a:spcPts val="800"/>
+              </a:spcAft>
+              <a:defRPr sz="1300">
+                <a:solidFill>
+                  <a:srgbClr val="A1A1AA"/>
+                </a:solidFill>
+                <a:latin typeface="Arial"/>
+              </a:defRPr>
+            </a:pPr>
+            <a:r>
+              <a:t>DBSCAN: Density-based algorithm. Groups core points within radius Eps having min_samples. Isolates outliers as noise.</a:t>
+            </a:r>
+          </a:p>
+          <a:p>
+            <a:pPr>
+              <a:spcAft>
+                <a:spcPts val="800"/>
+              </a:spcAft>
+              <a:defRPr sz="1300">
+                <a:solidFill>
+                  <a:srgbClr val="A1A1AA"/>
+                </a:solidFill>
+                <a:latin typeface="Arial"/>
+              </a:defRPr>
+            </a:pPr>
+            <a:r>
+              <a:t>Visual: Scikit-Learn K-Means customer segmentation showing centroids and color-mapped clusters.</a:t>
+            </a:r>
+          </a:p>
+        </p:txBody>
+      </p:sp>
+      <p:pic>
+        <p:nvPicPr>
+          <p:cNvPr id="6" name="Picture 5" descr="examples_6_kmeans.png"/>
+          <p:cNvPicPr>
+            <a:picLocks noChangeAspect="1"/>
+          </p:cNvPicPr>
+          <p:nvPr/>
+        </p:nvPicPr>
+        <p:blipFill>
+          <a:blip r:embed="rId2"/>
+          <a:stretch>
+            <a:fillRect/>
+          </a:stretch>
+        </p:blipFill>
+        <p:spPr>
+          <a:xfrm>
+            <a:off x="6583680" y="2225040"/>
+            <a:ext cx="4846320" cy="3230880"/>
           </a:xfrm>
           <a:prstGeom prst="rect">
             <a:avLst/>
           </a:prstGeom>
-          <a:noFill/>
-        </p:spPr>
-        <p:txBody>
-          <a:bodyPr wrap="square">
-            <a:spAutoFit/>
-          </a:bodyPr>
-          <a:lstStyle/>
-          <a:p>
-            <a:pPr>
-              <a:spcAft>
-                <a:spcPts val="1200"/>
-              </a:spcAft>
-              <a:defRPr sz="2200" b="1">
-                <a:solidFill>
-                  <a:srgbClr val="6366F1"/>
-                </a:solidFill>
-                <a:latin typeface="Arial"/>
-              </a:defRPr>
-            </a:pPr>
-            <a:r>
-              <a:t>Evaluation Metrics</a:t>
-            </a:r>
-          </a:p>
-          <a:p>
-            <a:pPr>
-              <a:spcAft>
-                <a:spcPts val="600"/>
-              </a:spcAft>
-              <a:defRPr sz="1400">
-                <a:solidFill>
-                  <a:srgbClr val="A1A1AA"/>
-                </a:solidFill>
-              </a:defRPr>
-            </a:pPr>
-            <a:r>
-              <a:t>• Regression Metrics:</a:t>
-            </a:r>
-          </a:p>
-          <a:p>
-            <a:pPr>
-              <a:spcAft>
-                <a:spcPts val="600"/>
-              </a:spcAft>
-              <a:defRPr sz="1400">
-                <a:solidFill>
-                  <a:srgbClr val="A1A1AA"/>
-                </a:solidFill>
-              </a:defRPr>
-            </a:pPr>
-            <a:r>
-              <a:t>  - MAE (Absolute scale), MSE/RMSE (Penalizes outliers), R-squared (variance explained).</a:t>
-            </a:r>
-          </a:p>
-          <a:p>
-            <a:pPr>
-              <a:spcAft>
-                <a:spcPts val="600"/>
-              </a:spcAft>
-              <a:defRPr sz="1400">
-                <a:solidFill>
-                  <a:srgbClr val="A1A1AA"/>
-                </a:solidFill>
-              </a:defRPr>
-            </a:pPr>
-            <a:r>
-              <a:t>• Classification Metrics (Confusion Matrix):</a:t>
-            </a:r>
-          </a:p>
-          <a:p>
-            <a:pPr>
-              <a:spcAft>
-                <a:spcPts val="600"/>
-              </a:spcAft>
-              <a:defRPr sz="1400">
-                <a:solidFill>
-                  <a:srgbClr val="A1A1AA"/>
-                </a:solidFill>
-              </a:defRPr>
-            </a:pPr>
-            <a:r>
-              <a:t>  - Accuracy: Overall correct predictions.</a:t>
-            </a:r>
-          </a:p>
-          <a:p>
-            <a:pPr>
-              <a:spcAft>
-                <a:spcPts val="600"/>
-              </a:spcAft>
-              <a:defRPr sz="1400">
-                <a:solidFill>
-                  <a:srgbClr val="A1A1AA"/>
-                </a:solidFill>
-              </a:defRPr>
-            </a:pPr>
-            <a:r>
-              <a:t>  - Precision: TP / (TP + FP) (Quality of Positives).</a:t>
-            </a:r>
-          </a:p>
-          <a:p>
-            <a:pPr>
-              <a:spcAft>
-                <a:spcPts val="600"/>
-              </a:spcAft>
-              <a:defRPr sz="1400">
-                <a:solidFill>
-                  <a:srgbClr val="A1A1AA"/>
-                </a:solidFill>
-              </a:defRPr>
-            </a:pPr>
-            <a:r>
-              <a:t>  - Recall: TP / (TP + FN) (Coverage of Positives).</a:t>
-            </a:r>
-          </a:p>
-          <a:p>
-            <a:pPr>
-              <a:spcAft>
-                <a:spcPts val="600"/>
-              </a:spcAft>
-              <a:defRPr sz="1400">
-                <a:solidFill>
-                  <a:srgbClr val="A1A1AA"/>
-                </a:solidFill>
-              </a:defRPr>
-            </a:pPr>
-            <a:r>
-              <a:t>  - F1-Score: Harmonic mean of Precision &amp; Recall.</a:t>
-            </a:r>
-          </a:p>
-          <a:p>
-            <a:pPr>
-              <a:spcAft>
-                <a:spcPts val="600"/>
-              </a:spcAft>
-              <a:defRPr sz="1400">
-                <a:solidFill>
-                  <a:srgbClr val="A1A1AA"/>
-                </a:solidFill>
-              </a:defRPr>
-            </a:pPr>
-            <a:r>
-              <a:t>  - ROC-AUC: Ability to distinguish classes.</a:t>
-            </a:r>
-          </a:p>
-        </p:txBody>
-      </p:sp>
+        </p:spPr>
+      </p:pic>
     </p:spTree>
   </p:cSld>
   <p:clrMapOvr>

--- a/machine_learning_fundamentals.pptx
+++ b/machine_learning_fundamentals.pptx
@@ -4410,7 +4410,7 @@
               </a:defRPr>
             </a:pPr>
             <a:r>
-              <a:t>Optimization: Adjusts embedding weights using SGD, forcing related terms (e.g. models/networks) to cluster together.</a:t>
+              <a:t>Optimization: Trained using the Adam optimizer implemented from scratch. Uses adaptive learning rates for faster, more stable coordinate updates.</a:t>
             </a:r>
           </a:p>
           <a:p>
@@ -6111,6 +6111,22 @@
             </a:pPr>
             <a:r>
               <a:t>Gradient Descent: Updates weights along negative gradient: w = w - eta * grad.</a:t>
+            </a:r>
+          </a:p>
+          <a:p>
+            <a:pPr>
+              <a:spcAft>
+                <a:spcPts val="800"/>
+              </a:spcAft>
+              <a:defRPr sz="1300">
+                <a:solidFill>
+                  <a:srgbClr val="A1A1AA"/>
+                </a:solidFill>
+                <a:latin typeface="Arial"/>
+              </a:defRPr>
+            </a:pPr>
+            <a:r>
+              <a:t>Adam Optimizer: Computes adaptive learning rates using first moment (momentum) and second moment (gradient variance). Scales updates per coordinate.</a:t>
             </a:r>
           </a:p>
           <a:p>
